--- a/demo8/slides/demo8-intro-slides.pptx
+++ b/demo8/slides/demo8-intro-slides.pptx
@@ -4370,8 +4370,8 @@
         </p:nvSpPr>
         <p:spPr>
           <a:xfrm>
-            <a:off x="9052560" y="1828800"/>
-            <a:ext cx="2926080" cy="4389120"/>
+            <a:off x="9052560" y="1691640"/>
+            <a:ext cx="2926080" cy="4572000"/>
           </a:xfrm>
           <a:prstGeom prst="rect">
             <a:avLst/>
@@ -4388,7 +4388,7 @@
               <a:spcAft>
                 <a:spcPts val="880"/>
               </a:spcAft>
-              <a:defRPr sz="1800">
+              <a:defRPr sz="1700">
                 <a:solidFill>
                   <a:srgbClr val="C4C6D0"/>
                 </a:solidFill>
@@ -4404,7 +4404,7 @@
               <a:spcAft>
                 <a:spcPts val="880"/>
               </a:spcAft>
-              <a:defRPr sz="1800">
+              <a:defRPr sz="1700">
                 <a:solidFill>
                   <a:srgbClr val="C4C6D0"/>
                 </a:solidFill>
@@ -4412,7 +4412,7 @@
               </a:defRPr>
             </a:pPr>
             <a:r>
-              <a:t>K = 1, the</a:t>
+              <a:t>K = 1, BM</a:t>
             </a:r>
           </a:p>
           <a:p>
@@ -4420,7 +4420,7 @@
               <a:spcAft>
                 <a:spcPts val="880"/>
               </a:spcAft>
-              <a:defRPr sz="1800">
+              <a:defRPr sz="1700">
                 <a:solidFill>
                   <a:srgbClr val="C4C6D0"/>
                 </a:solidFill>
@@ -4428,7 +4428,7 @@
               </a:defRPr>
             </a:pPr>
             <a:r>
-              <a:t>BM expectation.</a:t>
+              <a:t>expectation.</a:t>
             </a:r>
           </a:p>
           <a:p>
@@ -4436,7 +4436,7 @@
               <a:spcAft>
                 <a:spcPts val="880"/>
               </a:spcAft>
-              <a:defRPr sz="1800">
+              <a:defRPr sz="1700">
                 <a:solidFill>
                   <a:srgbClr val="C4C6D0"/>
                 </a:solidFill>
@@ -4449,7 +4449,7 @@
               <a:spcAft>
                 <a:spcPts val="880"/>
               </a:spcAft>
-              <a:defRPr sz="1800">
+              <a:defRPr sz="1700">
                 <a:solidFill>
                   <a:srgbClr val="C4C6D0"/>
                 </a:solidFill>
@@ -4457,7 +4457,7 @@
               </a:defRPr>
             </a:pPr>
             <a:r>
-              <a:t>Ecology bars</a:t>
+              <a:t>Watch for</a:t>
             </a:r>
           </a:p>
           <a:p>
@@ -4465,7 +4465,7 @@
               <a:spcAft>
                 <a:spcPts val="880"/>
               </a:spcAft>
-              <a:defRPr sz="1800">
+              <a:defRPr sz="1700">
                 <a:solidFill>
                   <a:srgbClr val="C4C6D0"/>
                 </a:solidFill>
@@ -4473,7 +4473,7 @@
               </a:defRPr>
             </a:pPr>
             <a:r>
-              <a:t>above color bars</a:t>
+              <a:t>ecology bars</a:t>
             </a:r>
           </a:p>
           <a:p>
@@ -4481,7 +4481,7 @@
               <a:spcAft>
                 <a:spcPts val="880"/>
               </a:spcAft>
-              <a:defRPr sz="1800">
+              <a:defRPr sz="1700">
                 <a:solidFill>
                   <a:srgbClr val="C4C6D0"/>
                 </a:solidFill>
@@ -4489,7 +4489,7 @@
               </a:defRPr>
             </a:pPr>
             <a:r>
-              <a:t>= color evolves</a:t>
+              <a:t>above color</a:t>
             </a:r>
           </a:p>
           <a:p>
@@ -4497,7 +4497,7 @@
               <a:spcAft>
                 <a:spcPts val="880"/>
               </a:spcAft>
-              <a:defRPr sz="1800">
+              <a:defRPr sz="1700">
                 <a:solidFill>
                   <a:srgbClr val="C4C6D0"/>
                 </a:solidFill>
@@ -4505,7 +4505,7 @@
               </a:defRPr>
             </a:pPr>
             <a:r>
-              <a:t>faster than the</a:t>
+              <a:t>bars in your</a:t>
             </a:r>
           </a:p>
           <a:p>
@@ -4513,7 +4513,7 @@
               <a:spcAft>
                 <a:spcPts val="880"/>
               </a:spcAft>
-              <a:defRPr sz="1800">
+              <a:defRPr sz="1700">
                 <a:solidFill>
                   <a:srgbClr val="C4C6D0"/>
                 </a:solidFill>
@@ -4521,7 +4521,55 @@
               </a:defRPr>
             </a:pPr>
             <a:r>
-              <a:t>niche it tracks.</a:t>
+              <a:t>own family —</a:t>
+            </a:r>
+          </a:p>
+          <a:p>
+            <a:pPr algn="l">
+              <a:spcAft>
+                <a:spcPts val="880"/>
+              </a:spcAft>
+              <a:defRPr sz="1700">
+                <a:solidFill>
+                  <a:srgbClr val="C4C6D0"/>
+                </a:solidFill>
+                <a:latin typeface="Aptos"/>
+              </a:defRPr>
+            </a:pPr>
+            <a:r>
+              <a:t>Chaetodontidae</a:t>
+            </a:r>
+          </a:p>
+          <a:p>
+            <a:pPr algn="l">
+              <a:spcAft>
+                <a:spcPts val="880"/>
+              </a:spcAft>
+              <a:defRPr sz="1700">
+                <a:solidFill>
+                  <a:srgbClr val="C4C6D0"/>
+                </a:solidFill>
+                <a:latin typeface="Aptos"/>
+              </a:defRPr>
+            </a:pPr>
+            <a:r>
+              <a:t>is too small to</a:t>
+            </a:r>
+          </a:p>
+          <a:p>
+            <a:pPr algn="l">
+              <a:spcAft>
+                <a:spcPts val="880"/>
+              </a:spcAft>
+              <a:defRPr sz="1700">
+                <a:solidFill>
+                  <a:srgbClr val="C4C6D0"/>
+                </a:solidFill>
+                <a:latin typeface="Aptos"/>
+              </a:defRPr>
+            </a:pPr>
+            <a:r>
+              <a:t>see it sharply.</a:t>
             </a:r>
           </a:p>
         </p:txBody>
@@ -6778,8 +6826,8 @@
         </p:nvSpPr>
         <p:spPr>
           <a:xfrm>
-            <a:off x="640080" y="2194560"/>
-            <a:ext cx="10972800" cy="1645920"/>
+            <a:off x="640080" y="2011680"/>
+            <a:ext cx="10972800" cy="1463040"/>
           </a:xfrm>
           <a:prstGeom prst="rect">
             <a:avLst/>
@@ -6794,7 +6842,7 @@
           <a:p>
             <a:pPr algn="ctr"/>
             <a:r>
-              <a:rPr sz="14000" b="1" i="0">
+              <a:rPr sz="13000" b="1" i="0">
                 <a:solidFill>
                   <a:srgbClr val="D4A853"/>
                 </a:solidFill>
@@ -6813,7 +6861,7 @@
         </p:nvSpPr>
         <p:spPr>
           <a:xfrm>
-            <a:off x="640080" y="4206240"/>
+            <a:off x="640080" y="3840480"/>
             <a:ext cx="10972800" cy="365760"/>
           </a:xfrm>
           <a:prstGeom prst="rect">
@@ -6835,7 +6883,7 @@
                 </a:solidFill>
                 <a:latin typeface="Aptos"/>
               </a:rPr>
-              <a:t>Chaetodontidae · multivariate Blomberg's K · 30 binary pattern motifs</a:t>
+              <a:t>Chaetodontidae · multivariate Blomberg's K · 30 binary motifs</a:t>
             </a:r>
           </a:p>
         </p:txBody>
@@ -6848,8 +6896,8 @@
         </p:nvSpPr>
         <p:spPr>
           <a:xfrm>
-            <a:off x="1828800" y="4846320"/>
-            <a:ext cx="8686800" cy="1188720"/>
+            <a:off x="1828800" y="4526280"/>
+            <a:ext cx="8686800" cy="868680"/>
           </a:xfrm>
           <a:prstGeom prst="rect">
             <a:avLst/>
@@ -6890,23 +6938,7 @@
               </a:defRPr>
             </a:pPr>
             <a:r>
-              <a:t>Convergence and reversal across the tree.</a:t>
-            </a:r>
-          </a:p>
-          <a:p>
-            <a:pPr algn="ctr">
-              <a:spcAft>
-                <a:spcPts val="880"/>
-              </a:spcAft>
-              <a:defRPr sz="1800">
-                <a:solidFill>
-                  <a:srgbClr val="F6F6F8"/>
-                </a:solidFill>
-                <a:latin typeface="Aptos"/>
-              </a:defRPr>
-            </a:pPr>
-            <a:r>
-              <a:t>Phylogeny barely predicts the next species' pattern.</a:t>
+              <a:t>Convergent across the tree.</a:t>
             </a:r>
           </a:p>
         </p:txBody>
@@ -6914,6 +6946,41 @@
       <p:sp>
         <p:nvSpPr>
           <p:cNvPr id="8" name="TextBox 7"/>
+          <p:cNvSpPr txBox="1"/>
+          <p:nvPr/>
+        </p:nvSpPr>
+        <p:spPr>
+          <a:xfrm>
+            <a:off x="640080" y="5715000"/>
+            <a:ext cx="10972800" cy="411480"/>
+          </a:xfrm>
+          <a:prstGeom prst="rect">
+            <a:avLst/>
+          </a:prstGeom>
+          <a:noFill/>
+        </p:spPr>
+        <p:txBody>
+          <a:bodyPr wrap="square" anchor="t">
+            <a:spAutoFit/>
+          </a:bodyPr>
+          <a:lstStyle/>
+          <a:p>
+            <a:pPr algn="ctr"/>
+            <a:r>
+              <a:rPr sz="2000" b="0" i="1">
+                <a:solidFill>
+                  <a:srgbClr val="E07A5F"/>
+                </a:solidFill>
+                <a:latin typeface="Aptos"/>
+              </a:rPr>
+              <a:t>A landmark — not a target. Your per-variable Ks won't hit 0.10.</a:t>
+            </a:r>
+          </a:p>
+        </p:txBody>
+      </p:sp>
+      <p:sp>
+        <p:nvSpPr>
+          <p:cNvPr id="9" name="TextBox 8"/>
           <p:cNvSpPr txBox="1"/>
           <p:nvPr/>
         </p:nvSpPr>

--- a/demo8/slides/demo8-intro-slides.pptx
+++ b/demo8/slides/demo8-intro-slides.pptx
@@ -24,6 +24,7 @@
     <p:sldId id="272" r:id="rId23"/>
     <p:sldId id="273" r:id="rId24"/>
     <p:sldId id="274" r:id="rId25"/>
+    <p:sldId id="275" r:id="rId26"/>
   </p:sldIdLst>
   <p:sldSz cx="12191695" cy="6858000" type="screen4x3"/>
   <p:notesSz cx="6858000" cy="9144000"/>
@@ -3380,7 +3381,7 @@
                 </a:solidFill>
                 <a:latin typeface="Georgia"/>
               </a:rPr>
-              <a:t>phyloPCA — same axes, different math</a:t>
+              <a:t>Part 2 — bring the tree back</a:t>
             </a:r>
           </a:p>
         </p:txBody>
@@ -3393,8 +3394,8 @@
         </p:nvSpPr>
         <p:spPr>
           <a:xfrm>
-            <a:off x="530352" y="914400"/>
-            <a:ext cx="10789920" cy="365760"/>
+            <a:off x="640080" y="1691640"/>
+            <a:ext cx="10972800" cy="502920"/>
           </a:xfrm>
           <a:prstGeom prst="rect">
             <a:avLst/>
@@ -3409,45 +3410,161 @@
           <a:p>
             <a:pPr algn="l"/>
             <a:r>
-              <a:rPr sz="1800" b="0" i="0">
+              <a:rPr sz="2200" b="0" i="0">
+                <a:solidFill>
+                  <a:srgbClr val="F6F6F8"/>
+                </a:solidFill>
+                <a:latin typeface="Aptos"/>
+              </a:rPr>
+              <a:t>Closely related species share trait values because they share genes.</a:t>
+            </a:r>
+          </a:p>
+        </p:txBody>
+      </p:sp>
+      <p:sp>
+        <p:nvSpPr>
+          <p:cNvPr id="5" name="TextBox 4"/>
+          <p:cNvSpPr txBox="1"/>
+          <p:nvPr/>
+        </p:nvSpPr>
+        <p:spPr>
+          <a:xfrm>
+            <a:off x="640080" y="2468880"/>
+            <a:ext cx="10972800" cy="411480"/>
+          </a:xfrm>
+          <a:prstGeom prst="rect">
+            <a:avLst/>
+          </a:prstGeom>
+          <a:noFill/>
+        </p:spPr>
+        <p:txBody>
+          <a:bodyPr wrap="square" anchor="t">
+            <a:spAutoFit/>
+          </a:bodyPr>
+          <a:lstStyle/>
+          <a:p>
+            <a:pPr algn="l"/>
+            <a:r>
+              <a:rPr sz="2000" b="0" i="0">
+                <a:solidFill>
+                  <a:srgbClr val="C4C6D0"/>
+                </a:solidFill>
+                <a:latin typeface="Aptos"/>
+              </a:rPr>
+              <a:t>Three corrections, in order:</a:t>
+            </a:r>
+          </a:p>
+        </p:txBody>
+      </p:sp>
+      <p:sp>
+        <p:nvSpPr>
+          <p:cNvPr id="6" name="TextBox 5"/>
+          <p:cNvSpPr txBox="1"/>
+          <p:nvPr/>
+        </p:nvSpPr>
+        <p:spPr>
+          <a:xfrm>
+            <a:off x="914400" y="3108960"/>
+            <a:ext cx="10515600" cy="2560320"/>
+          </a:xfrm>
+          <a:prstGeom prst="rect">
+            <a:avLst/>
+          </a:prstGeom>
+          <a:noFill/>
+        </p:spPr>
+        <p:txBody>
+          <a:bodyPr wrap="square">
+            <a:spAutoFit/>
+          </a:bodyPr>
+          <a:lstStyle/>
+          <a:p>
+            <a:pPr algn="l">
+              <a:spcAft>
+                <a:spcPts val="1120"/>
+              </a:spcAft>
+              <a:defRPr sz="2400">
                 <a:solidFill>
                   <a:srgbClr val="D4A853"/>
                 </a:solidFill>
                 <a:latin typeface="Aptos"/>
+              </a:defRPr>
+            </a:pPr>
+            <a:r>
+              <a:t>phyl.pca   — PCA reweighted by the tree's variance-covariance</a:t>
+            </a:r>
+          </a:p>
+          <a:p>
+            <a:pPr algn="l">
+              <a:spcAft>
+                <a:spcPts val="1120"/>
+              </a:spcAft>
+              <a:defRPr sz="2400">
+                <a:solidFill>
+                  <a:srgbClr val="D4A853"/>
+                </a:solidFill>
+                <a:latin typeface="Aptos"/>
+              </a:defRPr>
+            </a:pPr>
+            <a:r>
+              <a:t>PGLS       — bivariate regression where residuals can correlate via the tree</a:t>
+            </a:r>
+          </a:p>
+          <a:p>
+            <a:pPr algn="l">
+              <a:spcAft>
+                <a:spcPts val="1120"/>
+              </a:spcAft>
+              <a:defRPr sz="2400">
+                <a:solidFill>
+                  <a:srgbClr val="D4A853"/>
+                </a:solidFill>
+                <a:latin typeface="Aptos"/>
+              </a:defRPr>
+            </a:pPr>
+            <a:r>
+              <a:t>K and λ    — phylogenetic signal, per variable</a:t>
+            </a:r>
+          </a:p>
+        </p:txBody>
+      </p:sp>
+      <p:sp>
+        <p:nvSpPr>
+          <p:cNvPr id="7" name="TextBox 6"/>
+          <p:cNvSpPr txBox="1"/>
+          <p:nvPr/>
+        </p:nvSpPr>
+        <p:spPr>
+          <a:xfrm>
+            <a:off x="640080" y="5852160"/>
+            <a:ext cx="10972800" cy="365760"/>
+          </a:xfrm>
+          <a:prstGeom prst="rect">
+            <a:avLst/>
+          </a:prstGeom>
+          <a:noFill/>
+        </p:spPr>
+        <p:txBody>
+          <a:bodyPr wrap="square" anchor="t">
+            <a:spAutoFit/>
+          </a:bodyPr>
+          <a:lstStyle/>
+          <a:p>
+            <a:pPr algn="l"/>
+            <a:r>
+              <a:rPr sz="1800" b="0" i="1">
+                <a:solidFill>
+                  <a:srgbClr val="81B29A"/>
+                </a:solidFill>
+                <a:latin typeface="Aptos"/>
               </a:rPr>
-              <a:t>p_4 and m_c dropped because the trait covariance is rank-deficient</a:t>
-            </a:r>
-          </a:p>
-        </p:txBody>
-      </p:sp>
-      <p:pic>
-        <p:nvPicPr>
-          <p:cNvPr id="5" name="Picture 4" descr="phylopca-biplot-1.png"/>
-          <p:cNvPicPr>
-            <a:picLocks noChangeAspect="1"/>
-          </p:cNvPicPr>
-          <p:nvPr/>
-        </p:nvPicPr>
-        <p:blipFill>
-          <a:blip r:embed="rId2"/>
-          <a:stretch>
-            <a:fillRect/>
-          </a:stretch>
-        </p:blipFill>
-        <p:spPr>
-          <a:xfrm>
-            <a:off x="2651760" y="1417320"/>
-            <a:ext cx="6583680" cy="4937760"/>
-          </a:xfrm>
-          <a:prstGeom prst="rect">
-            <a:avLst/>
-          </a:prstGeom>
-          <a:effectLst/>
-        </p:spPr>
-      </p:pic>
-      <p:sp>
-        <p:nvSpPr>
-          <p:cNvPr id="6" name="TextBox 5"/>
+              <a:t>Same questions as Part 1. Different answer if phylogeny was driving things.</a:t>
+            </a:r>
+          </a:p>
+        </p:txBody>
+      </p:sp>
+      <p:sp>
+        <p:nvSpPr>
+          <p:cNvPr id="8" name="TextBox 7"/>
           <p:cNvSpPr txBox="1"/>
           <p:nvPr/>
         </p:nvSpPr>
@@ -3571,7 +3688,7 @@
                 </a:solidFill>
                 <a:latin typeface="Georgia"/>
               </a:rPr>
-              <a:t>Did phylogeny change which variables matter?</a:t>
+              <a:t>phyloPCA — same axes, different math</a:t>
             </a:r>
           </a:p>
         </p:txBody>
@@ -3606,14 +3723,14 @@
                 </a:solidFill>
                 <a:latin typeface="Aptos"/>
               </a:rPr>
-              <a:t>PC1 loading: phyloPCA vs ahistorical</a:t>
+              <a:t>p_4 and m_c dropped because the trait covariance is rank-deficient</a:t>
             </a:r>
           </a:p>
         </p:txBody>
       </p:sp>
       <p:pic>
         <p:nvPicPr>
-          <p:cNvPr id="5" name="Picture 4" descr="compare-loadings-1.png"/>
+          <p:cNvPr id="5" name="Picture 4" descr="phylopca-biplot-1.png"/>
           <p:cNvPicPr>
             <a:picLocks noChangeAspect="1"/>
           </p:cNvPicPr>
@@ -3627,8 +3744,8 @@
         </p:blipFill>
         <p:spPr>
           <a:xfrm>
-            <a:off x="1645919" y="1417320"/>
-            <a:ext cx="5760720" cy="4937760"/>
+            <a:off x="2651760" y="1417320"/>
+            <a:ext cx="6583680" cy="4937760"/>
           </a:xfrm>
           <a:prstGeom prst="rect">
             <a:avLst/>
@@ -3639,186 +3756,6 @@
       <p:sp>
         <p:nvSpPr>
           <p:cNvPr id="6" name="TextBox 5"/>
-          <p:cNvSpPr txBox="1"/>
-          <p:nvPr/>
-        </p:nvSpPr>
-        <p:spPr>
-          <a:xfrm>
-            <a:off x="8778240" y="1737360"/>
-            <a:ext cx="3200400" cy="4572000"/>
-          </a:xfrm>
-          <a:prstGeom prst="rect">
-            <a:avLst/>
-          </a:prstGeom>
-          <a:noFill/>
-        </p:spPr>
-        <p:txBody>
-          <a:bodyPr wrap="square">
-            <a:spAutoFit/>
-          </a:bodyPr>
-          <a:lstStyle/>
-          <a:p>
-            <a:pPr algn="l">
-              <a:spcAft>
-                <a:spcPts val="880"/>
-              </a:spcAft>
-              <a:defRPr sz="1800">
-                <a:solidFill>
-                  <a:srgbClr val="C4C6D0"/>
-                </a:solidFill>
-                <a:latin typeface="Aptos"/>
-              </a:defRPr>
-            </a:pPr>
-            <a:r>
-              <a:t>On the dashed</a:t>
-            </a:r>
-          </a:p>
-          <a:p>
-            <a:pPr algn="l">
-              <a:spcAft>
-                <a:spcPts val="880"/>
-              </a:spcAft>
-              <a:defRPr sz="1800">
-                <a:solidFill>
-                  <a:srgbClr val="C4C6D0"/>
-                </a:solidFill>
-                <a:latin typeface="Aptos"/>
-              </a:defRPr>
-            </a:pPr>
-            <a:r>
-              <a:t>line:</a:t>
-            </a:r>
-          </a:p>
-          <a:p>
-            <a:pPr algn="l">
-              <a:spcAft>
-                <a:spcPts val="880"/>
-              </a:spcAft>
-              <a:defRPr sz="1800">
-                <a:solidFill>
-                  <a:srgbClr val="C4C6D0"/>
-                </a:solidFill>
-                <a:latin typeface="Aptos"/>
-              </a:defRPr>
-            </a:pPr>
-            <a:r>
-              <a:t>phylogeny</a:t>
-            </a:r>
-          </a:p>
-          <a:p>
-            <a:pPr algn="l">
-              <a:spcAft>
-                <a:spcPts val="880"/>
-              </a:spcAft>
-              <a:defRPr sz="1800">
-                <a:solidFill>
-                  <a:srgbClr val="C4C6D0"/>
-                </a:solidFill>
-                <a:latin typeface="Aptos"/>
-              </a:defRPr>
-            </a:pPr>
-            <a:r>
-              <a:t>didn't change</a:t>
-            </a:r>
-          </a:p>
-          <a:p>
-            <a:pPr algn="l">
-              <a:spcAft>
-                <a:spcPts val="880"/>
-              </a:spcAft>
-              <a:defRPr sz="1800">
-                <a:solidFill>
-                  <a:srgbClr val="C4C6D0"/>
-                </a:solidFill>
-                <a:latin typeface="Aptos"/>
-              </a:defRPr>
-            </a:pPr>
-            <a:r>
-              <a:t>that variable's</a:t>
-            </a:r>
-          </a:p>
-          <a:p>
-            <a:pPr algn="l">
-              <a:spcAft>
-                <a:spcPts val="880"/>
-              </a:spcAft>
-              <a:defRPr sz="1800">
-                <a:solidFill>
-                  <a:srgbClr val="C4C6D0"/>
-                </a:solidFill>
-                <a:latin typeface="Aptos"/>
-              </a:defRPr>
-            </a:pPr>
-            <a:r>
-              <a:t>loading.</a:t>
-            </a:r>
-          </a:p>
-          <a:p>
-            <a:pPr algn="l">
-              <a:spcAft>
-                <a:spcPts val="880"/>
-              </a:spcAft>
-              <a:defRPr sz="1800">
-                <a:solidFill>
-                  <a:srgbClr val="C4C6D0"/>
-                </a:solidFill>
-                <a:latin typeface="Aptos"/>
-              </a:defRPr>
-            </a:pPr>
-          </a:p>
-          <a:p>
-            <a:pPr algn="l">
-              <a:spcAft>
-                <a:spcPts val="880"/>
-              </a:spcAft>
-              <a:defRPr sz="1800">
-                <a:solidFill>
-                  <a:srgbClr val="C4C6D0"/>
-                </a:solidFill>
-                <a:latin typeface="Aptos"/>
-              </a:defRPr>
-            </a:pPr>
-            <a:r>
-              <a:t>Far from it:</a:t>
-            </a:r>
-          </a:p>
-          <a:p>
-            <a:pPr algn="l">
-              <a:spcAft>
-                <a:spcPts val="880"/>
-              </a:spcAft>
-              <a:defRPr sz="1800">
-                <a:solidFill>
-                  <a:srgbClr val="C4C6D0"/>
-                </a:solidFill>
-                <a:latin typeface="Aptos"/>
-              </a:defRPr>
-            </a:pPr>
-            <a:r>
-              <a:t>shared ancestry</a:t>
-            </a:r>
-          </a:p>
-          <a:p>
-            <a:pPr algn="l">
-              <a:spcAft>
-                <a:spcPts val="880"/>
-              </a:spcAft>
-              <a:defRPr sz="1800">
-                <a:solidFill>
-                  <a:srgbClr val="C4C6D0"/>
-                </a:solidFill>
-                <a:latin typeface="Aptos"/>
-              </a:defRPr>
-            </a:pPr>
-            <a:r>
-              <a:t>was inflating it.</a:t>
-            </a:r>
-          </a:p>
-        </p:txBody>
-      </p:sp>
-      <p:sp>
-        <p:nvSpPr>
-          <p:cNvPr id="7" name="TextBox 6"/>
           <p:cNvSpPr txBox="1"/>
           <p:nvPr/>
         </p:nvSpPr>
@@ -3942,7 +3879,7 @@
                 </a:solidFill>
                 <a:latin typeface="Georgia"/>
               </a:rPr>
-              <a:t>Blomberg's K per pavo variable</a:t>
+              <a:t>Did phylogeny change which variables matter?</a:t>
             </a:r>
           </a:p>
         </p:txBody>
@@ -3977,14 +3914,14 @@
                 </a:solidFill>
                 <a:latin typeface="Aptos"/>
               </a:rPr>
-              <a:t>K &lt; 1 = relatives more different than Brownian expectation</a:t>
+              <a:t>PC1 loading: phyloPCA vs ahistorical</a:t>
             </a:r>
           </a:p>
         </p:txBody>
       </p:sp>
       <p:pic>
         <p:nvPicPr>
-          <p:cNvPr id="5" name="Picture 4" descr="signal-bar-1.png"/>
+          <p:cNvPr id="5" name="Picture 4" descr="compare-loadings-1.png"/>
           <p:cNvPicPr>
             <a:picLocks noChangeAspect="1"/>
           </p:cNvPicPr>
@@ -3998,8 +3935,8 @@
         </p:blipFill>
         <p:spPr>
           <a:xfrm>
-            <a:off x="640080" y="1571625"/>
-            <a:ext cx="8229600" cy="4629150"/>
+            <a:off x="1645919" y="1417320"/>
+            <a:ext cx="5760720" cy="4937760"/>
           </a:xfrm>
           <a:prstGeom prst="rect">
             <a:avLst/>
@@ -4015,8 +3952,8 @@
         </p:nvSpPr>
         <p:spPr>
           <a:xfrm>
-            <a:off x="9052560" y="1828800"/>
-            <a:ext cx="2926080" cy="4389120"/>
+            <a:off x="8778240" y="1737360"/>
+            <a:ext cx="3200400" cy="4572000"/>
           </a:xfrm>
           <a:prstGeom prst="rect">
             <a:avLst/>
@@ -4041,7 +3978,7 @@
               </a:defRPr>
             </a:pPr>
             <a:r>
-              <a:t>Blue bars:</a:t>
+              <a:t>On the dashed</a:t>
             </a:r>
           </a:p>
           <a:p>
@@ -4057,7 +3994,7 @@
               </a:defRPr>
             </a:pPr>
             <a:r>
-              <a:t>p &lt; 0.05 —</a:t>
+              <a:t>line:</a:t>
             </a:r>
           </a:p>
           <a:p>
@@ -4073,7 +4010,7 @@
               </a:defRPr>
             </a:pPr>
             <a:r>
-              <a:t>real signal.</a:t>
+              <a:t>phylogeny</a:t>
             </a:r>
           </a:p>
           <a:p>
@@ -4088,6 +4025,9 @@
                 <a:latin typeface="Aptos"/>
               </a:defRPr>
             </a:pPr>
+            <a:r>
+              <a:t>didn't change</a:t>
+            </a:r>
           </a:p>
           <a:p>
             <a:pPr algn="l">
@@ -4102,7 +4042,7 @@
               </a:defRPr>
             </a:pPr>
             <a:r>
-              <a:t>Dashed line:</a:t>
+              <a:t>that variable's</a:t>
             </a:r>
           </a:p>
           <a:p>
@@ -4118,7 +4058,7 @@
               </a:defRPr>
             </a:pPr>
             <a:r>
-              <a:t>Frédérich's</a:t>
+              <a:t>loading.</a:t>
             </a:r>
           </a:p>
           <a:p>
@@ -4133,9 +4073,6 @@
                 <a:latin typeface="Aptos"/>
               </a:defRPr>
             </a:pPr>
-            <a:r>
-              <a:t>K = 0.10 as</a:t>
-            </a:r>
           </a:p>
           <a:p>
             <a:pPr algn="l">
@@ -4150,7 +4087,7 @@
               </a:defRPr>
             </a:pPr>
             <a:r>
-              <a:t>a landmark,</a:t>
+              <a:t>Far from it:</a:t>
             </a:r>
           </a:p>
           <a:p>
@@ -4166,7 +4103,23 @@
               </a:defRPr>
             </a:pPr>
             <a:r>
-              <a:t>not a target.</a:t>
+              <a:t>shared ancestry</a:t>
+            </a:r>
+          </a:p>
+          <a:p>
+            <a:pPr algn="l">
+              <a:spcAft>
+                <a:spcPts val="880"/>
+              </a:spcAft>
+              <a:defRPr sz="1800">
+                <a:solidFill>
+                  <a:srgbClr val="C4C6D0"/>
+                </a:solidFill>
+                <a:latin typeface="Aptos"/>
+              </a:defRPr>
+            </a:pPr>
+            <a:r>
+              <a:t>was inflating it.</a:t>
             </a:r>
           </a:p>
         </p:txBody>
@@ -4297,7 +4250,7 @@
                 </a:solidFill>
                 <a:latin typeface="Georgia"/>
               </a:rPr>
-              <a:t>Color signal vs ecology signal</a:t>
+              <a:t>Blomberg's K per pavo variable</a:t>
             </a:r>
           </a:p>
         </p:txBody>
@@ -4332,14 +4285,14 @@
                 </a:solidFill>
                 <a:latin typeface="Aptos"/>
               </a:rPr>
-              <a:t>where the demo lands</a:t>
+              <a:t>K &lt; 1 = relatives more different than Brownian expectation</a:t>
             </a:r>
           </a:p>
         </p:txBody>
       </p:sp>
       <p:pic>
         <p:nvPicPr>
-          <p:cNvPr id="5" name="Picture 4" descr="signal-color-vs-ecology-1.png"/>
+          <p:cNvPr id="5" name="Picture 4" descr="signal-bar-1.png"/>
           <p:cNvPicPr>
             <a:picLocks noChangeAspect="1"/>
           </p:cNvPicPr>
@@ -4370,8 +4323,8 @@
         </p:nvSpPr>
         <p:spPr>
           <a:xfrm>
-            <a:off x="9052560" y="1691640"/>
-            <a:ext cx="2926080" cy="4572000"/>
+            <a:off x="9052560" y="1828800"/>
+            <a:ext cx="2926080" cy="4389120"/>
           </a:xfrm>
           <a:prstGeom prst="rect">
             <a:avLst/>
@@ -4388,7 +4341,7 @@
               <a:spcAft>
                 <a:spcPts val="880"/>
               </a:spcAft>
-              <a:defRPr sz="1700">
+              <a:defRPr sz="1800">
                 <a:solidFill>
                   <a:srgbClr val="C4C6D0"/>
                 </a:solidFill>
@@ -4396,7 +4349,7 @@
               </a:defRPr>
             </a:pPr>
             <a:r>
-              <a:t>Dotted line:</a:t>
+              <a:t>Blue bars:</a:t>
             </a:r>
           </a:p>
           <a:p>
@@ -4404,7 +4357,7 @@
               <a:spcAft>
                 <a:spcPts val="880"/>
               </a:spcAft>
-              <a:defRPr sz="1700">
+              <a:defRPr sz="1800">
                 <a:solidFill>
                   <a:srgbClr val="C4C6D0"/>
                 </a:solidFill>
@@ -4412,7 +4365,7 @@
               </a:defRPr>
             </a:pPr>
             <a:r>
-              <a:t>K = 1, BM</a:t>
+              <a:t>p &lt; 0.05 —</a:t>
             </a:r>
           </a:p>
           <a:p>
@@ -4420,7 +4373,7 @@
               <a:spcAft>
                 <a:spcPts val="880"/>
               </a:spcAft>
-              <a:defRPr sz="1700">
+              <a:defRPr sz="1800">
                 <a:solidFill>
                   <a:srgbClr val="C4C6D0"/>
                 </a:solidFill>
@@ -4428,7 +4381,7 @@
               </a:defRPr>
             </a:pPr>
             <a:r>
-              <a:t>expectation.</a:t>
+              <a:t>real signal.</a:t>
             </a:r>
           </a:p>
           <a:p>
@@ -4436,7 +4389,7 @@
               <a:spcAft>
                 <a:spcPts val="880"/>
               </a:spcAft>
-              <a:defRPr sz="1700">
+              <a:defRPr sz="1800">
                 <a:solidFill>
                   <a:srgbClr val="C4C6D0"/>
                 </a:solidFill>
@@ -4449,7 +4402,7 @@
               <a:spcAft>
                 <a:spcPts val="880"/>
               </a:spcAft>
-              <a:defRPr sz="1700">
+              <a:defRPr sz="1800">
                 <a:solidFill>
                   <a:srgbClr val="C4C6D0"/>
                 </a:solidFill>
@@ -4457,7 +4410,7 @@
               </a:defRPr>
             </a:pPr>
             <a:r>
-              <a:t>Watch for</a:t>
+              <a:t>Dashed line:</a:t>
             </a:r>
           </a:p>
           <a:p>
@@ -4465,7 +4418,7 @@
               <a:spcAft>
                 <a:spcPts val="880"/>
               </a:spcAft>
-              <a:defRPr sz="1700">
+              <a:defRPr sz="1800">
                 <a:solidFill>
                   <a:srgbClr val="C4C6D0"/>
                 </a:solidFill>
@@ -4473,7 +4426,7 @@
               </a:defRPr>
             </a:pPr>
             <a:r>
-              <a:t>ecology bars</a:t>
+              <a:t>Frédérich's</a:t>
             </a:r>
           </a:p>
           <a:p>
@@ -4481,7 +4434,7 @@
               <a:spcAft>
                 <a:spcPts val="880"/>
               </a:spcAft>
-              <a:defRPr sz="1700">
+              <a:defRPr sz="1800">
                 <a:solidFill>
                   <a:srgbClr val="C4C6D0"/>
                 </a:solidFill>
@@ -4489,7 +4442,7 @@
               </a:defRPr>
             </a:pPr>
             <a:r>
-              <a:t>above color</a:t>
+              <a:t>K = 0.10 as</a:t>
             </a:r>
           </a:p>
           <a:p>
@@ -4497,7 +4450,7 @@
               <a:spcAft>
                 <a:spcPts val="880"/>
               </a:spcAft>
-              <a:defRPr sz="1700">
+              <a:defRPr sz="1800">
                 <a:solidFill>
                   <a:srgbClr val="C4C6D0"/>
                 </a:solidFill>
@@ -4505,7 +4458,7 @@
               </a:defRPr>
             </a:pPr>
             <a:r>
-              <a:t>bars in your</a:t>
+              <a:t>a landmark,</a:t>
             </a:r>
           </a:p>
           <a:p>
@@ -4513,7 +4466,7 @@
               <a:spcAft>
                 <a:spcPts val="880"/>
               </a:spcAft>
-              <a:defRPr sz="1700">
+              <a:defRPr sz="1800">
                 <a:solidFill>
                   <a:srgbClr val="C4C6D0"/>
                 </a:solidFill>
@@ -4521,55 +4474,7 @@
               </a:defRPr>
             </a:pPr>
             <a:r>
-              <a:t>own family —</a:t>
-            </a:r>
-          </a:p>
-          <a:p>
-            <a:pPr algn="l">
-              <a:spcAft>
-                <a:spcPts val="880"/>
-              </a:spcAft>
-              <a:defRPr sz="1700">
-                <a:solidFill>
-                  <a:srgbClr val="C4C6D0"/>
-                </a:solidFill>
-                <a:latin typeface="Aptos"/>
-              </a:defRPr>
-            </a:pPr>
-            <a:r>
-              <a:t>Chaetodontidae</a:t>
-            </a:r>
-          </a:p>
-          <a:p>
-            <a:pPr algn="l">
-              <a:spcAft>
-                <a:spcPts val="880"/>
-              </a:spcAft>
-              <a:defRPr sz="1700">
-                <a:solidFill>
-                  <a:srgbClr val="C4C6D0"/>
-                </a:solidFill>
-                <a:latin typeface="Aptos"/>
-              </a:defRPr>
-            </a:pPr>
-            <a:r>
-              <a:t>is too small to</a:t>
-            </a:r>
-          </a:p>
-          <a:p>
-            <a:pPr algn="l">
-              <a:spcAft>
-                <a:spcPts val="880"/>
-              </a:spcAft>
-              <a:defRPr sz="1700">
-                <a:solidFill>
-                  <a:srgbClr val="C4C6D0"/>
-                </a:solidFill>
-                <a:latin typeface="Aptos"/>
-              </a:defRPr>
-            </a:pPr>
-            <a:r>
-              <a:t>see it sharply.</a:t>
+              <a:t>not a target.</a:t>
             </a:r>
           </a:p>
         </p:txBody>
@@ -4700,7 +4605,7 @@
                 </a:solidFill>
                 <a:latin typeface="Georgia"/>
               </a:rPr>
-              <a:t>Part 3 — admit you got the numbers from a photograph</a:t>
+              <a:t>Color signal vs ecology signal</a:t>
             </a:r>
           </a:p>
         </p:txBody>
@@ -4713,8 +4618,68 @@
         </p:nvSpPr>
         <p:spPr>
           <a:xfrm>
-            <a:off x="822960" y="2011680"/>
-            <a:ext cx="10515600" cy="3657600"/>
+            <a:off x="530352" y="914400"/>
+            <a:ext cx="10789920" cy="365760"/>
+          </a:xfrm>
+          <a:prstGeom prst="rect">
+            <a:avLst/>
+          </a:prstGeom>
+          <a:noFill/>
+        </p:spPr>
+        <p:txBody>
+          <a:bodyPr wrap="square" anchor="t">
+            <a:spAutoFit/>
+          </a:bodyPr>
+          <a:lstStyle/>
+          <a:p>
+            <a:pPr algn="l"/>
+            <a:r>
+              <a:rPr sz="1800" b="0" i="0">
+                <a:solidFill>
+                  <a:srgbClr val="D4A853"/>
+                </a:solidFill>
+                <a:latin typeface="Aptos"/>
+              </a:rPr>
+              <a:t>where the demo lands</a:t>
+            </a:r>
+          </a:p>
+        </p:txBody>
+      </p:sp>
+      <p:pic>
+        <p:nvPicPr>
+          <p:cNvPr id="5" name="Picture 4" descr="signal-color-vs-ecology-1.png"/>
+          <p:cNvPicPr>
+            <a:picLocks noChangeAspect="1"/>
+          </p:cNvPicPr>
+          <p:nvPr/>
+        </p:nvPicPr>
+        <p:blipFill>
+          <a:blip r:embed="rId2"/>
+          <a:stretch>
+            <a:fillRect/>
+          </a:stretch>
+        </p:blipFill>
+        <p:spPr>
+          <a:xfrm>
+            <a:off x="640080" y="1571625"/>
+            <a:ext cx="8229600" cy="4629150"/>
+          </a:xfrm>
+          <a:prstGeom prst="rect">
+            <a:avLst/>
+          </a:prstGeom>
+          <a:effectLst/>
+        </p:spPr>
+      </p:pic>
+      <p:sp>
+        <p:nvSpPr>
+          <p:cNvPr id="6" name="TextBox 5"/>
+          <p:cNvSpPr txBox="1"/>
+          <p:nvPr/>
+        </p:nvSpPr>
+        <p:spPr>
+          <a:xfrm>
+            <a:off x="9052560" y="1691640"/>
+            <a:ext cx="2926080" cy="4572000"/>
           </a:xfrm>
           <a:prstGeom prst="rect">
             <a:avLst/>
@@ -4729,59 +4694,59 @@
           <a:p>
             <a:pPr algn="l">
               <a:spcAft>
-                <a:spcPts val="1120"/>
+                <a:spcPts val="880"/>
               </a:spcAft>
-              <a:defRPr sz="2600">
-                <a:solidFill>
-                  <a:srgbClr val="F6F6F8"/>
+              <a:defRPr sz="1700">
+                <a:solidFill>
+                  <a:srgbClr val="C4C6D0"/>
                 </a:solidFill>
                 <a:latin typeface="Aptos"/>
               </a:defRPr>
             </a:pPr>
             <a:r>
-              <a:t>Pick one species. Photograph it five times.</a:t>
+              <a:t>Dotted line:</a:t>
             </a:r>
           </a:p>
           <a:p>
             <a:pPr algn="l">
               <a:spcAft>
-                <a:spcPts val="1120"/>
+                <a:spcPts val="880"/>
               </a:spcAft>
-              <a:defRPr sz="2600">
-                <a:solidFill>
-                  <a:srgbClr val="F6F6F8"/>
+              <a:defRPr sz="1700">
+                <a:solidFill>
+                  <a:srgbClr val="C4C6D0"/>
                 </a:solidFill>
                 <a:latin typeface="Aptos"/>
               </a:defRPr>
             </a:pPr>
             <a:r>
-              <a:t>Compute pavo on each photo.</a:t>
+              <a:t>K = 1, BM</a:t>
             </a:r>
           </a:p>
           <a:p>
             <a:pPr algn="l">
               <a:spcAft>
-                <a:spcPts val="1120"/>
+                <a:spcPts val="880"/>
               </a:spcAft>
-              <a:defRPr sz="2600">
-                <a:solidFill>
-                  <a:srgbClr val="F6F6F8"/>
+              <a:defRPr sz="1700">
+                <a:solidFill>
+                  <a:srgbClr val="C4C6D0"/>
                 </a:solidFill>
                 <a:latin typeface="Aptos"/>
               </a:defRPr>
             </a:pPr>
             <a:r>
-              <a:t>The spread is your measurement noise.</a:t>
+              <a:t>expectation.</a:t>
             </a:r>
           </a:p>
           <a:p>
             <a:pPr algn="l">
               <a:spcAft>
-                <a:spcPts val="1120"/>
+                <a:spcPts val="880"/>
               </a:spcAft>
-              <a:defRPr sz="2600">
-                <a:solidFill>
-                  <a:srgbClr val="F6F6F8"/>
+              <a:defRPr sz="1700">
+                <a:solidFill>
+                  <a:srgbClr val="C4C6D0"/>
                 </a:solidFill>
                 <a:latin typeface="Aptos"/>
               </a:defRPr>
@@ -4790,59 +4755,136 @@
           <a:p>
             <a:pPr algn="l">
               <a:spcAft>
-                <a:spcPts val="1120"/>
+                <a:spcPts val="880"/>
               </a:spcAft>
-              <a:defRPr sz="2600">
-                <a:solidFill>
-                  <a:srgbClr val="F6F6F8"/>
+              <a:defRPr sz="1700">
+                <a:solidFill>
+                  <a:srgbClr val="C4C6D0"/>
                 </a:solidFill>
                 <a:latin typeface="Aptos"/>
               </a:defRPr>
             </a:pPr>
             <a:r>
-              <a:t>Now ask: how much of Part 2 survives noise of that size?</a:t>
-            </a:r>
-          </a:p>
-        </p:txBody>
-      </p:sp>
-      <p:sp>
-        <p:nvSpPr>
-          <p:cNvPr id="5" name="TextBox 4"/>
-          <p:cNvSpPr txBox="1"/>
-          <p:nvPr/>
-        </p:nvSpPr>
-        <p:spPr>
-          <a:xfrm>
-            <a:off x="822960" y="5669280"/>
-            <a:ext cx="10972800" cy="457200"/>
-          </a:xfrm>
-          <a:prstGeom prst="rect">
-            <a:avLst/>
-          </a:prstGeom>
-          <a:noFill/>
-        </p:spPr>
-        <p:txBody>
-          <a:bodyPr wrap="square" anchor="t">
-            <a:spAutoFit/>
-          </a:bodyPr>
-          <a:lstStyle/>
-          <a:p>
-            <a:pPr algn="l"/>
-            <a:r>
-              <a:rPr sz="2000" b="0" i="1">
-                <a:solidFill>
-                  <a:srgbClr val="D4A853"/>
-                </a:solidFill>
-                <a:latin typeface="Aptos"/>
-              </a:rPr>
-              <a:t>Monte Carlo: re-run Parts 1 &amp; 2 a hundred times under that noise.</a:t>
-            </a:r>
-          </a:p>
-        </p:txBody>
-      </p:sp>
-      <p:sp>
-        <p:nvSpPr>
-          <p:cNvPr id="6" name="TextBox 5"/>
+              <a:t>Watch for</a:t>
+            </a:r>
+          </a:p>
+          <a:p>
+            <a:pPr algn="l">
+              <a:spcAft>
+                <a:spcPts val="880"/>
+              </a:spcAft>
+              <a:defRPr sz="1700">
+                <a:solidFill>
+                  <a:srgbClr val="C4C6D0"/>
+                </a:solidFill>
+                <a:latin typeface="Aptos"/>
+              </a:defRPr>
+            </a:pPr>
+            <a:r>
+              <a:t>ecology bars</a:t>
+            </a:r>
+          </a:p>
+          <a:p>
+            <a:pPr algn="l">
+              <a:spcAft>
+                <a:spcPts val="880"/>
+              </a:spcAft>
+              <a:defRPr sz="1700">
+                <a:solidFill>
+                  <a:srgbClr val="C4C6D0"/>
+                </a:solidFill>
+                <a:latin typeface="Aptos"/>
+              </a:defRPr>
+            </a:pPr>
+            <a:r>
+              <a:t>above color</a:t>
+            </a:r>
+          </a:p>
+          <a:p>
+            <a:pPr algn="l">
+              <a:spcAft>
+                <a:spcPts val="880"/>
+              </a:spcAft>
+              <a:defRPr sz="1700">
+                <a:solidFill>
+                  <a:srgbClr val="C4C6D0"/>
+                </a:solidFill>
+                <a:latin typeface="Aptos"/>
+              </a:defRPr>
+            </a:pPr>
+            <a:r>
+              <a:t>bars in your</a:t>
+            </a:r>
+          </a:p>
+          <a:p>
+            <a:pPr algn="l">
+              <a:spcAft>
+                <a:spcPts val="880"/>
+              </a:spcAft>
+              <a:defRPr sz="1700">
+                <a:solidFill>
+                  <a:srgbClr val="C4C6D0"/>
+                </a:solidFill>
+                <a:latin typeface="Aptos"/>
+              </a:defRPr>
+            </a:pPr>
+            <a:r>
+              <a:t>own family —</a:t>
+            </a:r>
+          </a:p>
+          <a:p>
+            <a:pPr algn="l">
+              <a:spcAft>
+                <a:spcPts val="880"/>
+              </a:spcAft>
+              <a:defRPr sz="1700">
+                <a:solidFill>
+                  <a:srgbClr val="C4C6D0"/>
+                </a:solidFill>
+                <a:latin typeface="Aptos"/>
+              </a:defRPr>
+            </a:pPr>
+            <a:r>
+              <a:t>Chaetodontidae</a:t>
+            </a:r>
+          </a:p>
+          <a:p>
+            <a:pPr algn="l">
+              <a:spcAft>
+                <a:spcPts val="880"/>
+              </a:spcAft>
+              <a:defRPr sz="1700">
+                <a:solidFill>
+                  <a:srgbClr val="C4C6D0"/>
+                </a:solidFill>
+                <a:latin typeface="Aptos"/>
+              </a:defRPr>
+            </a:pPr>
+            <a:r>
+              <a:t>is too small to</a:t>
+            </a:r>
+          </a:p>
+          <a:p>
+            <a:pPr algn="l">
+              <a:spcAft>
+                <a:spcPts val="880"/>
+              </a:spcAft>
+              <a:defRPr sz="1700">
+                <a:solidFill>
+                  <a:srgbClr val="C4C6D0"/>
+                </a:solidFill>
+                <a:latin typeface="Aptos"/>
+              </a:defRPr>
+            </a:pPr>
+            <a:r>
+              <a:t>see it sharply.</a:t>
+            </a:r>
+          </a:p>
+        </p:txBody>
+      </p:sp>
+      <p:sp>
+        <p:nvSpPr>
+          <p:cNvPr id="7" name="TextBox 6"/>
           <p:cNvSpPr txBox="1"/>
           <p:nvPr/>
         </p:nvSpPr>
@@ -4966,7 +5008,7 @@
                 </a:solidFill>
                 <a:latin typeface="Georgia"/>
               </a:rPr>
-              <a:t>Within-species noise — Heniochus_acuminatus × 5 images</a:t>
+              <a:t>Part 3 — admit you got the numbers from a photograph</a:t>
             </a:r>
           </a:p>
         </p:txBody>
@@ -4979,8 +5021,108 @@
         </p:nvSpPr>
         <p:spPr>
           <a:xfrm>
-            <a:off x="530352" y="914400"/>
-            <a:ext cx="10789920" cy="365760"/>
+            <a:off x="822960" y="2011680"/>
+            <a:ext cx="10515600" cy="3657600"/>
+          </a:xfrm>
+          <a:prstGeom prst="rect">
+            <a:avLst/>
+          </a:prstGeom>
+          <a:noFill/>
+        </p:spPr>
+        <p:txBody>
+          <a:bodyPr wrap="square">
+            <a:spAutoFit/>
+          </a:bodyPr>
+          <a:lstStyle/>
+          <a:p>
+            <a:pPr algn="l">
+              <a:spcAft>
+                <a:spcPts val="1120"/>
+              </a:spcAft>
+              <a:defRPr sz="2600">
+                <a:solidFill>
+                  <a:srgbClr val="F6F6F8"/>
+                </a:solidFill>
+                <a:latin typeface="Aptos"/>
+              </a:defRPr>
+            </a:pPr>
+            <a:r>
+              <a:t>Pick one species. Photograph it five times.</a:t>
+            </a:r>
+          </a:p>
+          <a:p>
+            <a:pPr algn="l">
+              <a:spcAft>
+                <a:spcPts val="1120"/>
+              </a:spcAft>
+              <a:defRPr sz="2600">
+                <a:solidFill>
+                  <a:srgbClr val="F6F6F8"/>
+                </a:solidFill>
+                <a:latin typeface="Aptos"/>
+              </a:defRPr>
+            </a:pPr>
+            <a:r>
+              <a:t>Compute pavo on each photo.</a:t>
+            </a:r>
+          </a:p>
+          <a:p>
+            <a:pPr algn="l">
+              <a:spcAft>
+                <a:spcPts val="1120"/>
+              </a:spcAft>
+              <a:defRPr sz="2600">
+                <a:solidFill>
+                  <a:srgbClr val="F6F6F8"/>
+                </a:solidFill>
+                <a:latin typeface="Aptos"/>
+              </a:defRPr>
+            </a:pPr>
+            <a:r>
+              <a:t>The spread is your measurement noise.</a:t>
+            </a:r>
+          </a:p>
+          <a:p>
+            <a:pPr algn="l">
+              <a:spcAft>
+                <a:spcPts val="1120"/>
+              </a:spcAft>
+              <a:defRPr sz="2600">
+                <a:solidFill>
+                  <a:srgbClr val="F6F6F8"/>
+                </a:solidFill>
+                <a:latin typeface="Aptos"/>
+              </a:defRPr>
+            </a:pPr>
+          </a:p>
+          <a:p>
+            <a:pPr algn="l">
+              <a:spcAft>
+                <a:spcPts val="1120"/>
+              </a:spcAft>
+              <a:defRPr sz="2600">
+                <a:solidFill>
+                  <a:srgbClr val="F6F6F8"/>
+                </a:solidFill>
+                <a:latin typeface="Aptos"/>
+              </a:defRPr>
+            </a:pPr>
+            <a:r>
+              <a:t>Now ask: how much of Part 2 survives noise of that size?</a:t>
+            </a:r>
+          </a:p>
+        </p:txBody>
+      </p:sp>
+      <p:sp>
+        <p:nvSpPr>
+          <p:cNvPr id="5" name="TextBox 4"/>
+          <p:cNvSpPr txBox="1"/>
+          <p:nvPr/>
+        </p:nvSpPr>
+        <p:spPr>
+          <a:xfrm>
+            <a:off x="822960" y="5669280"/>
+            <a:ext cx="10972800" cy="457200"/>
           </a:xfrm>
           <a:prstGeom prst="rect">
             <a:avLst/>
@@ -4995,193 +5137,20 @@
           <a:p>
             <a:pPr algn="l"/>
             <a:r>
-              <a:rPr sz="1800" b="0" i="0">
+              <a:rPr sz="2000" b="0" i="1">
                 <a:solidFill>
                   <a:srgbClr val="D4A853"/>
                 </a:solidFill>
                 <a:latin typeface="Aptos"/>
               </a:rPr>
-              <a:t>five dots per variable; bar = mean</a:t>
-            </a:r>
-          </a:p>
-        </p:txBody>
-      </p:sp>
-      <p:pic>
-        <p:nvPicPr>
-          <p:cNvPr id="5" name="Picture 4" descr="error-strip-1.png"/>
-          <p:cNvPicPr>
-            <a:picLocks noChangeAspect="1"/>
-          </p:cNvPicPr>
-          <p:nvPr/>
-        </p:nvPicPr>
-        <p:blipFill>
-          <a:blip r:embed="rId2"/>
-          <a:stretch>
-            <a:fillRect/>
-          </a:stretch>
-        </p:blipFill>
-        <p:spPr>
-          <a:xfrm>
-            <a:off x="640080" y="1571625"/>
-            <a:ext cx="8229600" cy="4629150"/>
-          </a:xfrm>
-          <a:prstGeom prst="rect">
-            <a:avLst/>
-          </a:prstGeom>
-          <a:effectLst/>
-        </p:spPr>
-      </p:pic>
+              <a:t>Monte Carlo: re-run Parts 1 &amp; 2 a hundred times under that noise.</a:t>
+            </a:r>
+          </a:p>
+        </p:txBody>
+      </p:sp>
       <p:sp>
         <p:nvSpPr>
           <p:cNvPr id="6" name="TextBox 5"/>
-          <p:cNvSpPr txBox="1"/>
-          <p:nvPr/>
-        </p:nvSpPr>
-        <p:spPr>
-          <a:xfrm>
-            <a:off x="9052560" y="1828800"/>
-            <a:ext cx="2926080" cy="4389120"/>
-          </a:xfrm>
-          <a:prstGeom prst="rect">
-            <a:avLst/>
-          </a:prstGeom>
-          <a:noFill/>
-        </p:spPr>
-        <p:txBody>
-          <a:bodyPr wrap="square">
-            <a:spAutoFit/>
-          </a:bodyPr>
-          <a:lstStyle/>
-          <a:p>
-            <a:pPr algn="l">
-              <a:spcAft>
-                <a:spcPts val="880"/>
-              </a:spcAft>
-              <a:defRPr sz="1800">
-                <a:solidFill>
-                  <a:srgbClr val="C4C6D0"/>
-                </a:solidFill>
-                <a:latin typeface="Aptos"/>
-              </a:defRPr>
-            </a:pPr>
-            <a:r>
-              <a:t>Tight clusters</a:t>
-            </a:r>
-          </a:p>
-          <a:p>
-            <a:pPr algn="l">
-              <a:spcAft>
-                <a:spcPts val="880"/>
-              </a:spcAft>
-              <a:defRPr sz="1800">
-                <a:solidFill>
-                  <a:srgbClr val="C4C6D0"/>
-                </a:solidFill>
-                <a:latin typeface="Aptos"/>
-              </a:defRPr>
-            </a:pPr>
-            <a:r>
-              <a:t>→ pavo is</a:t>
-            </a:r>
-          </a:p>
-          <a:p>
-            <a:pPr algn="l">
-              <a:spcAft>
-                <a:spcPts val="880"/>
-              </a:spcAft>
-              <a:defRPr sz="1800">
-                <a:solidFill>
-                  <a:srgbClr val="C4C6D0"/>
-                </a:solidFill>
-                <a:latin typeface="Aptos"/>
-              </a:defRPr>
-            </a:pPr>
-            <a:r>
-              <a:t>  reliable.</a:t>
-            </a:r>
-          </a:p>
-          <a:p>
-            <a:pPr algn="l">
-              <a:spcAft>
-                <a:spcPts val="880"/>
-              </a:spcAft>
-              <a:defRPr sz="1800">
-                <a:solidFill>
-                  <a:srgbClr val="C4C6D0"/>
-                </a:solidFill>
-                <a:latin typeface="Aptos"/>
-              </a:defRPr>
-            </a:pPr>
-          </a:p>
-          <a:p>
-            <a:pPr algn="l">
-              <a:spcAft>
-                <a:spcPts val="880"/>
-              </a:spcAft>
-              <a:defRPr sz="1800">
-                <a:solidFill>
-                  <a:srgbClr val="C4C6D0"/>
-                </a:solidFill>
-                <a:latin typeface="Aptos"/>
-              </a:defRPr>
-            </a:pPr>
-            <a:r>
-              <a:t>Wide spread</a:t>
-            </a:r>
-          </a:p>
-          <a:p>
-            <a:pPr algn="l">
-              <a:spcAft>
-                <a:spcPts val="880"/>
-              </a:spcAft>
-              <a:defRPr sz="1800">
-                <a:solidFill>
-                  <a:srgbClr val="C4C6D0"/>
-                </a:solidFill>
-                <a:latin typeface="Aptos"/>
-              </a:defRPr>
-            </a:pPr>
-            <a:r>
-              <a:t>→ that variable's</a:t>
-            </a:r>
-          </a:p>
-          <a:p>
-            <a:pPr algn="l">
-              <a:spcAft>
-                <a:spcPts val="880"/>
-              </a:spcAft>
-              <a:defRPr sz="1800">
-                <a:solidFill>
-                  <a:srgbClr val="C4C6D0"/>
-                </a:solidFill>
-                <a:latin typeface="Aptos"/>
-              </a:defRPr>
-            </a:pPr>
-            <a:r>
-              <a:t>  Part 2 result</a:t>
-            </a:r>
-          </a:p>
-          <a:p>
-            <a:pPr algn="l">
-              <a:spcAft>
-                <a:spcPts val="880"/>
-              </a:spcAft>
-              <a:defRPr sz="1800">
-                <a:solidFill>
-                  <a:srgbClr val="C4C6D0"/>
-                </a:solidFill>
-                <a:latin typeface="Aptos"/>
-              </a:defRPr>
-            </a:pPr>
-            <a:r>
-              <a:t>  is fragile.</a:t>
-            </a:r>
-          </a:p>
-        </p:txBody>
-      </p:sp>
-      <p:sp>
-        <p:nvSpPr>
-          <p:cNvPr id="7" name="TextBox 6"/>
           <p:cNvSpPr txBox="1"/>
           <p:nvPr/>
         </p:nvSpPr>
@@ -5305,7 +5274,7 @@
                 </a:solidFill>
                 <a:latin typeface="Georgia"/>
               </a:rPr>
-              <a:t>K under noise — 100 Monte Carlo re-fits</a:t>
+              <a:t>Within-species noise — Heniochus_acuminatus × 5 images</a:t>
             </a:r>
           </a:p>
         </p:txBody>
@@ -5340,14 +5309,14 @@
                 </a:solidFill>
                 <a:latin typeface="Aptos"/>
               </a:rPr>
-              <a:t>gold dot = observed K (Part 2)</a:t>
+              <a:t>five dots per variable; bar = mean</a:t>
             </a:r>
           </a:p>
         </p:txBody>
       </p:sp>
       <p:pic>
         <p:nvPicPr>
-          <p:cNvPr id="5" name="Picture 4" descr="mc-K-plot-1.png"/>
+          <p:cNvPr id="5" name="Picture 4" descr="error-strip-1.png"/>
           <p:cNvPicPr>
             <a:picLocks noChangeAspect="1"/>
           </p:cNvPicPr>
@@ -5361,8 +5330,8 @@
         </p:blipFill>
         <p:spPr>
           <a:xfrm>
-            <a:off x="804671" y="1417320"/>
-            <a:ext cx="7900416" cy="4937760"/>
+            <a:off x="640080" y="1571625"/>
+            <a:ext cx="8229600" cy="4629150"/>
           </a:xfrm>
           <a:prstGeom prst="rect">
             <a:avLst/>
@@ -5404,7 +5373,7 @@
               </a:defRPr>
             </a:pPr>
             <a:r>
-              <a:t>Gold inside the</a:t>
+              <a:t>Tight clusters</a:t>
             </a:r>
           </a:p>
           <a:p>
@@ -5420,7 +5389,7 @@
               </a:defRPr>
             </a:pPr>
             <a:r>
-              <a:t>box: robust.</a:t>
+              <a:t>→ pavo is</a:t>
             </a:r>
           </a:p>
           <a:p>
@@ -5435,6 +5404,9 @@
                 <a:latin typeface="Aptos"/>
               </a:defRPr>
             </a:pPr>
+            <a:r>
+              <a:t>  reliable.</a:t>
+            </a:r>
           </a:p>
           <a:p>
             <a:pPr algn="l">
@@ -5448,9 +5420,6 @@
                 <a:latin typeface="Aptos"/>
               </a:defRPr>
             </a:pPr>
-            <a:r>
-              <a:t>Gold outside:</a:t>
-            </a:r>
           </a:p>
           <a:p>
             <a:pPr algn="l">
@@ -5465,7 +5434,7 @@
               </a:defRPr>
             </a:pPr>
             <a:r>
-              <a:t>you got lucky —</a:t>
+              <a:t>Wide spread</a:t>
             </a:r>
           </a:p>
           <a:p>
@@ -5481,7 +5450,7 @@
               </a:defRPr>
             </a:pPr>
             <a:r>
-              <a:t>a different photo</a:t>
+              <a:t>→ that variable's</a:t>
             </a:r>
           </a:p>
           <a:p>
@@ -5497,7 +5466,7 @@
               </a:defRPr>
             </a:pPr>
             <a:r>
-              <a:t>would have given</a:t>
+              <a:t>  Part 2 result</a:t>
             </a:r>
           </a:p>
           <a:p>
@@ -5513,7 +5482,7 @@
               </a:defRPr>
             </a:pPr>
             <a:r>
-              <a:t>a different K.</a:t>
+              <a:t>  is fragile.</a:t>
             </a:r>
           </a:p>
         </p:txBody>
@@ -5644,7 +5613,7 @@
                 </a:solidFill>
                 <a:latin typeface="Georgia"/>
               </a:rPr>
-              <a:t>What you turn in</a:t>
+              <a:t>K under noise — 100 Monte Carlo re-fits</a:t>
             </a:r>
           </a:p>
         </p:txBody>
@@ -5679,21 +5648,46 @@
                 </a:solidFill>
                 <a:latin typeface="Aptos"/>
               </a:rPr>
-              <a:t>BruinLearn · end of day Wednesday</a:t>
-            </a:r>
-          </a:p>
-        </p:txBody>
-      </p:sp>
-      <p:sp>
-        <p:nvSpPr>
-          <p:cNvPr id="5" name="TextBox 4"/>
+              <a:t>gold dot = observed K (Part 2)</a:t>
+            </a:r>
+          </a:p>
+        </p:txBody>
+      </p:sp>
+      <p:pic>
+        <p:nvPicPr>
+          <p:cNvPr id="5" name="Picture 4" descr="mc-K-plot-1.png"/>
+          <p:cNvPicPr>
+            <a:picLocks noChangeAspect="1"/>
+          </p:cNvPicPr>
+          <p:nvPr/>
+        </p:nvPicPr>
+        <p:blipFill>
+          <a:blip r:embed="rId2"/>
+          <a:stretch>
+            <a:fillRect/>
+          </a:stretch>
+        </p:blipFill>
+        <p:spPr>
+          <a:xfrm>
+            <a:off x="804671" y="1417320"/>
+            <a:ext cx="7900416" cy="4937760"/>
+          </a:xfrm>
+          <a:prstGeom prst="rect">
+            <a:avLst/>
+          </a:prstGeom>
+          <a:effectLst/>
+        </p:spPr>
+      </p:pic>
+      <p:sp>
+        <p:nvSpPr>
+          <p:cNvPr id="6" name="TextBox 5"/>
           <p:cNvSpPr txBox="1"/>
           <p:nvPr/>
         </p:nvSpPr>
         <p:spPr>
           <a:xfrm>
-            <a:off x="822960" y="1691640"/>
-            <a:ext cx="10515600" cy="4114800"/>
+            <a:off x="9052560" y="1828800"/>
+            <a:ext cx="2926080" cy="4389120"/>
           </a:xfrm>
           <a:prstGeom prst="rect">
             <a:avLst/>
@@ -5708,88 +5702,133 @@
           <a:p>
             <a:pPr algn="l">
               <a:spcAft>
-                <a:spcPts val="1200"/>
+                <a:spcPts val="880"/>
               </a:spcAft>
-              <a:defRPr sz="2400">
-                <a:solidFill>
-                  <a:srgbClr val="F6F6F8"/>
+              <a:defRPr sz="1800">
+                <a:solidFill>
+                  <a:srgbClr val="C4C6D0"/>
                 </a:solidFill>
                 <a:latin typeface="Aptos"/>
               </a:defRPr>
             </a:pPr>
             <a:r>
-              <a:t>1.  Part 1 PCA scatter — your family</a:t>
+              <a:t>Gold inside the</a:t>
             </a:r>
           </a:p>
           <a:p>
             <a:pPr algn="l">
               <a:spcAft>
-                <a:spcPts val="1200"/>
+                <a:spcPts val="880"/>
               </a:spcAft>
-              <a:defRPr sz="2400">
-                <a:solidFill>
-                  <a:srgbClr val="F6F6F8"/>
+              <a:defRPr sz="1800">
+                <a:solidFill>
+                  <a:srgbClr val="C4C6D0"/>
                 </a:solidFill>
                 <a:latin typeface="Aptos"/>
               </a:defRPr>
             </a:pPr>
             <a:r>
-              <a:t>2.  Part 2 K plot + one-line interpretation per variable</a:t>
+              <a:t>box: robust.</a:t>
             </a:r>
           </a:p>
           <a:p>
             <a:pPr algn="l">
               <a:spcAft>
-                <a:spcPts val="1200"/>
+                <a:spcPts val="880"/>
               </a:spcAft>
-              <a:defRPr sz="2400">
-                <a:solidFill>
-                  <a:srgbClr val="F6F6F8"/>
+              <a:defRPr sz="1800">
+                <a:solidFill>
+                  <a:srgbClr val="C4C6D0"/>
                 </a:solidFill>
                 <a:latin typeface="Aptos"/>
               </a:defRPr>
             </a:pPr>
-            <a:r>
-              <a:t>3.  Part 3 Monte-Carlo CI on one statistic of your choosing</a:t>
-            </a:r>
           </a:p>
           <a:p>
             <a:pPr algn="l">
               <a:spcAft>
-                <a:spcPts val="1200"/>
+                <a:spcPts val="880"/>
               </a:spcAft>
-              <a:defRPr sz="2400">
-                <a:solidFill>
-                  <a:srgbClr val="F6F6F8"/>
+              <a:defRPr sz="1800">
+                <a:solidFill>
+                  <a:srgbClr val="C4C6D0"/>
                 </a:solidFill>
                 <a:latin typeface="Aptos"/>
               </a:defRPr>
             </a:pPr>
             <a:r>
-              <a:t>4.  One paragraph (≤ 250 words): does color in your family match Frédérich,</a:t>
+              <a:t>Gold outside:</a:t>
             </a:r>
           </a:p>
           <a:p>
             <a:pPr algn="l">
               <a:spcAft>
-                <a:spcPts val="1200"/>
+                <a:spcPts val="880"/>
               </a:spcAft>
-              <a:defRPr sz="2400">
-                <a:solidFill>
-                  <a:srgbClr val="F6F6F8"/>
+              <a:defRPr sz="1800">
+                <a:solidFill>
+                  <a:srgbClr val="C4C6D0"/>
                 </a:solidFill>
                 <a:latin typeface="Aptos"/>
               </a:defRPr>
             </a:pPr>
             <a:r>
-              <a:t>     and which conclusions survive measurement error?</a:t>
-            </a:r>
-          </a:p>
-        </p:txBody>
-      </p:sp>
-      <p:sp>
-        <p:nvSpPr>
-          <p:cNvPr id="6" name="TextBox 5"/>
+              <a:t>you got lucky —</a:t>
+            </a:r>
+          </a:p>
+          <a:p>
+            <a:pPr algn="l">
+              <a:spcAft>
+                <a:spcPts val="880"/>
+              </a:spcAft>
+              <a:defRPr sz="1800">
+                <a:solidFill>
+                  <a:srgbClr val="C4C6D0"/>
+                </a:solidFill>
+                <a:latin typeface="Aptos"/>
+              </a:defRPr>
+            </a:pPr>
+            <a:r>
+              <a:t>a different photo</a:t>
+            </a:r>
+          </a:p>
+          <a:p>
+            <a:pPr algn="l">
+              <a:spcAft>
+                <a:spcPts val="880"/>
+              </a:spcAft>
+              <a:defRPr sz="1800">
+                <a:solidFill>
+                  <a:srgbClr val="C4C6D0"/>
+                </a:solidFill>
+                <a:latin typeface="Aptos"/>
+              </a:defRPr>
+            </a:pPr>
+            <a:r>
+              <a:t>would have given</a:t>
+            </a:r>
+          </a:p>
+          <a:p>
+            <a:pPr algn="l">
+              <a:spcAft>
+                <a:spcPts val="880"/>
+              </a:spcAft>
+              <a:defRPr sz="1800">
+                <a:solidFill>
+                  <a:srgbClr val="C4C6D0"/>
+                </a:solidFill>
+                <a:latin typeface="Aptos"/>
+              </a:defRPr>
+            </a:pPr>
+            <a:r>
+              <a:t>a different K.</a:t>
+            </a:r>
+          </a:p>
+        </p:txBody>
+      </p:sp>
+      <p:sp>
+        <p:nvSpPr>
+          <p:cNvPr id="7" name="TextBox 6"/>
           <p:cNvSpPr txBox="1"/>
           <p:nvPr/>
         </p:nvSpPr>
@@ -5913,7 +5952,7 @@
                 </a:solidFill>
                 <a:latin typeface="Georgia"/>
               </a:rPr>
-              <a:t>Tonight</a:t>
+              <a:t>What you turn in</a:t>
             </a:r>
           </a:p>
         </p:txBody>
@@ -5948,7 +5987,7 @@
                 </a:solidFill>
                 <a:latin typeface="Aptos"/>
               </a:rPr>
-              <a:t>prep page · ~20 minutes</a:t>
+              <a:t>BruinLearn · end of day Wednesday</a:t>
             </a:r>
           </a:p>
         </p:txBody>
@@ -5961,8 +6000,8 @@
         </p:nvSpPr>
         <p:spPr>
           <a:xfrm>
-            <a:off x="822960" y="1828800"/>
-            <a:ext cx="10515600" cy="3657600"/>
+            <a:off x="822960" y="1691640"/>
+            <a:ext cx="10515600" cy="4114800"/>
           </a:xfrm>
           <a:prstGeom prst="rect">
             <a:avLst/>
@@ -5987,7 +6026,7 @@
               </a:defRPr>
             </a:pPr>
             <a:r>
-              <a:t>1.  Install R packages (one chunk on the prep page)</a:t>
+              <a:t>1.  Part 1 PCA scatter — your family</a:t>
             </a:r>
           </a:p>
           <a:p>
@@ -6003,7 +6042,7 @@
               </a:defRPr>
             </a:pPr>
             <a:r>
-              <a:t>2.  Download the Chaetodontidae bundle</a:t>
+              <a:t>2.  Part 2 K plot + one-line interpretation per variable</a:t>
             </a:r>
           </a:p>
           <a:p>
@@ -6019,7 +6058,7 @@
               </a:defRPr>
             </a:pPr>
             <a:r>
-              <a:t>3.  Run the readiness check until it prints PASS</a:t>
+              <a:t>3.  Part 3 Monte-Carlo CI on one statistic of your choosing</a:t>
             </a:r>
           </a:p>
           <a:p>
@@ -6035,7 +6074,23 @@
               </a:defRPr>
             </a:pPr>
             <a:r>
-              <a:t>4.  Confirm your group's mini-bundle login on FishView</a:t>
+              <a:t>4.  One paragraph (≤ 250 words): does color in your family match Frédérich,</a:t>
+            </a:r>
+          </a:p>
+          <a:p>
+            <a:pPr algn="l">
+              <a:spcAft>
+                <a:spcPts val="1200"/>
+              </a:spcAft>
+              <a:defRPr sz="2400">
+                <a:solidFill>
+                  <a:srgbClr val="F6F6F8"/>
+                </a:solidFill>
+                <a:latin typeface="Aptos"/>
+              </a:defRPr>
+            </a:pPr>
+            <a:r>
+              <a:t>     and which conclusions survive measurement error?</a:t>
             </a:r>
           </a:p>
         </p:txBody>
@@ -6043,41 +6098,6 @@
       <p:sp>
         <p:nvSpPr>
           <p:cNvPr id="6" name="TextBox 5"/>
-          <p:cNvSpPr txBox="1"/>
-          <p:nvPr/>
-        </p:nvSpPr>
-        <p:spPr>
-          <a:xfrm>
-            <a:off x="822960" y="5760720"/>
-            <a:ext cx="10972800" cy="457200"/>
-          </a:xfrm>
-          <a:prstGeom prst="rect">
-            <a:avLst/>
-          </a:prstGeom>
-          <a:noFill/>
-        </p:spPr>
-        <p:txBody>
-          <a:bodyPr wrap="square" anchor="t">
-            <a:spAutoFit/>
-          </a:bodyPr>
-          <a:lstStyle/>
-          <a:p>
-            <a:pPr algn="l"/>
-            <a:r>
-              <a:rPr sz="2200" b="0" i="0">
-                <a:solidFill>
-                  <a:srgbClr val="D4A853"/>
-                </a:solidFill>
-                <a:latin typeface="Aptos"/>
-              </a:rPr>
-              <a:t>michaelalfaro.github.io/eeb187-demos/demo8/demo8-prep.html</a:t>
-            </a:r>
-          </a:p>
-        </p:txBody>
-      </p:sp>
-      <p:sp>
-        <p:nvSpPr>
-          <p:cNvPr id="7" name="TextBox 6"/>
           <p:cNvSpPr txBox="1"/>
           <p:nvPr/>
         </p:nvSpPr>
@@ -6179,8 +6199,8 @@
         </p:nvSpPr>
         <p:spPr>
           <a:xfrm>
-            <a:off x="640080" y="2743200"/>
-            <a:ext cx="10972800" cy="914400"/>
+            <a:off x="502920" y="256032"/>
+            <a:ext cx="11155680" cy="640080"/>
           </a:xfrm>
           <a:prstGeom prst="rect">
             <a:avLst/>
@@ -6193,15 +6213,15 @@
           </a:bodyPr>
           <a:lstStyle/>
           <a:p>
-            <a:pPr algn="ctr"/>
-            <a:r>
-              <a:rPr sz="6400" b="1" i="0">
+            <a:pPr algn="l"/>
+            <a:r>
+              <a:rPr sz="3600" b="1" i="0">
                 <a:solidFill>
                   <a:srgbClr val="F6F6F8"/>
                 </a:solidFill>
                 <a:latin typeface="Georgia"/>
               </a:rPr>
-              <a:t>See you Wednesday.</a:t>
+              <a:t>Tonight</a:t>
             </a:r>
           </a:p>
         </p:txBody>
@@ -6214,8 +6234,8 @@
         </p:nvSpPr>
         <p:spPr>
           <a:xfrm>
-            <a:off x="640080" y="3840480"/>
-            <a:ext cx="10972800" cy="457200"/>
+            <a:off x="530352" y="914400"/>
+            <a:ext cx="10789920" cy="365760"/>
           </a:xfrm>
           <a:prstGeom prst="rect">
             <a:avLst/>
@@ -6228,15 +6248,15 @@
           </a:bodyPr>
           <a:lstStyle/>
           <a:p>
-            <a:pPr algn="ctr"/>
-            <a:r>
-              <a:rPr sz="2400" b="0" i="1">
+            <a:pPr algn="l"/>
+            <a:r>
+              <a:rPr sz="1800" b="0" i="0">
                 <a:solidFill>
                   <a:srgbClr val="D4A853"/>
                 </a:solidFill>
                 <a:latin typeface="Aptos"/>
               </a:rPr>
-              <a:t>Bring your laptop charged. We move fast.</a:t>
+              <a:t>prep page · ~20 minutes</a:t>
             </a:r>
           </a:p>
         </p:txBody>
@@ -6244,6 +6264,128 @@
       <p:sp>
         <p:nvSpPr>
           <p:cNvPr id="5" name="TextBox 4"/>
+          <p:cNvSpPr txBox="1"/>
+          <p:nvPr/>
+        </p:nvSpPr>
+        <p:spPr>
+          <a:xfrm>
+            <a:off x="822960" y="1828800"/>
+            <a:ext cx="10515600" cy="3657600"/>
+          </a:xfrm>
+          <a:prstGeom prst="rect">
+            <a:avLst/>
+          </a:prstGeom>
+          <a:noFill/>
+        </p:spPr>
+        <p:txBody>
+          <a:bodyPr wrap="square">
+            <a:spAutoFit/>
+          </a:bodyPr>
+          <a:lstStyle/>
+          <a:p>
+            <a:pPr algn="l">
+              <a:spcAft>
+                <a:spcPts val="1200"/>
+              </a:spcAft>
+              <a:defRPr sz="2400">
+                <a:solidFill>
+                  <a:srgbClr val="F6F6F8"/>
+                </a:solidFill>
+                <a:latin typeface="Aptos"/>
+              </a:defRPr>
+            </a:pPr>
+            <a:r>
+              <a:t>1.  Install R packages (one chunk on the prep page)</a:t>
+            </a:r>
+          </a:p>
+          <a:p>
+            <a:pPr algn="l">
+              <a:spcAft>
+                <a:spcPts val="1200"/>
+              </a:spcAft>
+              <a:defRPr sz="2400">
+                <a:solidFill>
+                  <a:srgbClr val="F6F6F8"/>
+                </a:solidFill>
+                <a:latin typeface="Aptos"/>
+              </a:defRPr>
+            </a:pPr>
+            <a:r>
+              <a:t>2.  Download the Chaetodontidae walkthrough bundle</a:t>
+            </a:r>
+          </a:p>
+          <a:p>
+            <a:pPr algn="l">
+              <a:spcAft>
+                <a:spcPts val="1200"/>
+              </a:spcAft>
+              <a:defRPr sz="2400">
+                <a:solidFill>
+                  <a:srgbClr val="F6F6F8"/>
+                </a:solidFill>
+                <a:latin typeface="Aptos"/>
+              </a:defRPr>
+            </a:pPr>
+            <a:r>
+              <a:t>3.  Run the readiness check until it prints PASS</a:t>
+            </a:r>
+          </a:p>
+          <a:p>
+            <a:pPr algn="l">
+              <a:spcAft>
+                <a:spcPts val="1200"/>
+              </a:spcAft>
+              <a:defRPr sz="2400">
+                <a:solidFill>
+                  <a:srgbClr val="F6F6F8"/>
+                </a:solidFill>
+                <a:latin typeface="Aptos"/>
+              </a:defRPr>
+            </a:pPr>
+            <a:r>
+              <a:t>4.  Confirm your Demo 7 FishView login still works — you'll build your bundle in class</a:t>
+            </a:r>
+          </a:p>
+        </p:txBody>
+      </p:sp>
+      <p:sp>
+        <p:nvSpPr>
+          <p:cNvPr id="6" name="TextBox 5"/>
+          <p:cNvSpPr txBox="1"/>
+          <p:nvPr/>
+        </p:nvSpPr>
+        <p:spPr>
+          <a:xfrm>
+            <a:off x="822960" y="5760720"/>
+            <a:ext cx="10972800" cy="457200"/>
+          </a:xfrm>
+          <a:prstGeom prst="rect">
+            <a:avLst/>
+          </a:prstGeom>
+          <a:noFill/>
+        </p:spPr>
+        <p:txBody>
+          <a:bodyPr wrap="square" anchor="t">
+            <a:spAutoFit/>
+          </a:bodyPr>
+          <a:lstStyle/>
+          <a:p>
+            <a:pPr algn="l"/>
+            <a:r>
+              <a:rPr sz="2200" b="0" i="0">
+                <a:solidFill>
+                  <a:srgbClr val="D4A853"/>
+                </a:solidFill>
+                <a:latin typeface="Aptos"/>
+              </a:rPr>
+              <a:t>michaelalfaro.github.io/eeb187-demos/demo8/demo8-prep.html</a:t>
+            </a:r>
+          </a:p>
+        </p:txBody>
+      </p:sp>
+      <p:sp>
+        <p:nvSpPr>
+          <p:cNvPr id="7" name="TextBox 6"/>
           <p:cNvSpPr txBox="1"/>
           <p:nvPr/>
         </p:nvSpPr>
@@ -6695,6 +6837,172 @@
 </p:sld>
 </file>
 
+<file path=ppt/slides/slide20.xml><?xml version="1.0" encoding="utf-8"?>
+<p:sld xmlns:a="http://schemas.openxmlformats.org/drawingml/2006/main" xmlns:p="http://schemas.openxmlformats.org/presentationml/2006/main" xmlns:r="http://schemas.openxmlformats.org/officeDocument/2006/relationships">
+  <p:cSld>
+    <p:spTree>
+      <p:nvGrpSpPr>
+        <p:cNvPr id="1" name=""/>
+        <p:cNvGrpSpPr/>
+        <p:nvPr/>
+      </p:nvGrpSpPr>
+      <p:grpSpPr/>
+      <p:sp>
+        <p:nvSpPr>
+          <p:cNvPr id="2" name="Rectangle 1"/>
+          <p:cNvSpPr/>
+          <p:nvPr/>
+        </p:nvSpPr>
+        <p:spPr>
+          <a:xfrm>
+            <a:off x="0" y="0"/>
+            <a:ext cx="12191695" cy="6858000"/>
+          </a:xfrm>
+          <a:prstGeom prst="rect">
+            <a:avLst/>
+          </a:prstGeom>
+          <a:solidFill>
+            <a:srgbClr val="181B2B"/>
+          </a:solidFill>
+          <a:ln>
+            <a:noFill/>
+          </a:ln>
+        </p:spPr>
+        <p:style>
+          <a:lnRef idx="1">
+            <a:schemeClr val="accent1"/>
+          </a:lnRef>
+          <a:fillRef idx="3">
+            <a:schemeClr val="accent1"/>
+          </a:fillRef>
+          <a:effectRef idx="2">
+            <a:schemeClr val="accent1"/>
+          </a:effectRef>
+          <a:fontRef idx="minor">
+            <a:schemeClr val="lt1"/>
+          </a:fontRef>
+        </p:style>
+        <p:txBody>
+          <a:bodyPr rtlCol="0" anchor="ctr"/>
+          <a:lstStyle/>
+          <a:p>
+            <a:pPr algn="ctr"/>
+          </a:p>
+        </p:txBody>
+      </p:sp>
+      <p:sp>
+        <p:nvSpPr>
+          <p:cNvPr id="3" name="TextBox 2"/>
+          <p:cNvSpPr txBox="1"/>
+          <p:nvPr/>
+        </p:nvSpPr>
+        <p:spPr>
+          <a:xfrm>
+            <a:off x="640080" y="2743200"/>
+            <a:ext cx="10972800" cy="914400"/>
+          </a:xfrm>
+          <a:prstGeom prst="rect">
+            <a:avLst/>
+          </a:prstGeom>
+          <a:noFill/>
+        </p:spPr>
+        <p:txBody>
+          <a:bodyPr wrap="square" anchor="t">
+            <a:spAutoFit/>
+          </a:bodyPr>
+          <a:lstStyle/>
+          <a:p>
+            <a:pPr algn="ctr"/>
+            <a:r>
+              <a:rPr sz="6400" b="1" i="0">
+                <a:solidFill>
+                  <a:srgbClr val="F6F6F8"/>
+                </a:solidFill>
+                <a:latin typeface="Georgia"/>
+              </a:rPr>
+              <a:t>See you Wednesday.</a:t>
+            </a:r>
+          </a:p>
+        </p:txBody>
+      </p:sp>
+      <p:sp>
+        <p:nvSpPr>
+          <p:cNvPr id="4" name="TextBox 3"/>
+          <p:cNvSpPr txBox="1"/>
+          <p:nvPr/>
+        </p:nvSpPr>
+        <p:spPr>
+          <a:xfrm>
+            <a:off x="640080" y="3840480"/>
+            <a:ext cx="10972800" cy="457200"/>
+          </a:xfrm>
+          <a:prstGeom prst="rect">
+            <a:avLst/>
+          </a:prstGeom>
+          <a:noFill/>
+        </p:spPr>
+        <p:txBody>
+          <a:bodyPr wrap="square" anchor="t">
+            <a:spAutoFit/>
+          </a:bodyPr>
+          <a:lstStyle/>
+          <a:p>
+            <a:pPr algn="ctr"/>
+            <a:r>
+              <a:rPr sz="2400" b="0" i="1">
+                <a:solidFill>
+                  <a:srgbClr val="D4A853"/>
+                </a:solidFill>
+                <a:latin typeface="Aptos"/>
+              </a:rPr>
+              <a:t>Bring your laptop charged. We move fast.</a:t>
+            </a:r>
+          </a:p>
+        </p:txBody>
+      </p:sp>
+      <p:sp>
+        <p:nvSpPr>
+          <p:cNvPr id="5" name="TextBox 4"/>
+          <p:cNvSpPr txBox="1"/>
+          <p:nvPr/>
+        </p:nvSpPr>
+        <p:spPr>
+          <a:xfrm>
+            <a:off x="502920" y="6510528"/>
+            <a:ext cx="6400800" cy="201168"/>
+          </a:xfrm>
+          <a:prstGeom prst="rect">
+            <a:avLst/>
+          </a:prstGeom>
+          <a:noFill/>
+        </p:spPr>
+        <p:txBody>
+          <a:bodyPr wrap="square" anchor="t">
+            <a:spAutoFit/>
+          </a:bodyPr>
+          <a:lstStyle/>
+          <a:p>
+            <a:pPr algn="l"/>
+            <a:r>
+              <a:rPr sz="1000" b="0" i="0">
+                <a:solidFill>
+                  <a:srgbClr val="9196A8"/>
+                </a:solidFill>
+                <a:latin typeface="Aptos"/>
+              </a:rPr>
+              <a:t>EEB 187 · Demo 8 · May 20 2026</a:t>
+            </a:r>
+          </a:p>
+        </p:txBody>
+      </p:sp>
+    </p:spTree>
+  </p:cSld>
+  <p:clrMapOvr>
+    <a:masterClrMapping/>
+  </p:clrMapOvr>
+</p:sld>
+</file>
+
 <file path=ppt/slides/slide3.xml><?xml version="1.0" encoding="utf-8"?>
 <p:sld xmlns:a="http://schemas.openxmlformats.org/drawingml/2006/main" xmlns:p="http://schemas.openxmlformats.org/presentationml/2006/main" xmlns:r="http://schemas.openxmlformats.org/officeDocument/2006/relationships">
   <p:cSld>
@@ -7139,7 +7447,7 @@
                 </a:solidFill>
                 <a:latin typeface="Aptos"/>
               </a:rPr>
-              <a:t>Chaetodontidae mini-bundle</a:t>
+              <a:t>Chaetodontidae mini-bundle — pre-built, watch-only</a:t>
             </a:r>
           </a:p>
         </p:txBody>
@@ -7178,7 +7486,7 @@
               </a:defRPr>
             </a:pPr>
             <a:r>
-              <a:t>19 butterflyfish species — 5 genera, all matched to a pruned chronogram</a:t>
+              <a:t>19 butterflyfish species, 5 genera, matched to a pruned chronogram</a:t>
             </a:r>
           </a:p>
           <a:p>
@@ -7194,7 +7502,7 @@
               </a:defRPr>
             </a:pPr>
             <a:r>
-              <a:t>1 of those 19 ships 5 images instead of 1 — the "error-species" for Part 3</a:t>
+              <a:t>One error-species, photographed 5 times — the noise stack for Part 3</a:t>
             </a:r>
           </a:p>
           <a:p>
@@ -7226,7 +7534,7 @@
               </a:defRPr>
             </a:pPr>
             <a:r>
-              <a:t>4 ecological traits from FishBase: trophic level, max depth, max length, vulnerability</a:t>
+              <a:t>4 FishBase traits: trophic level, max depth, max length, vulnerability</a:t>
             </a:r>
           </a:p>
         </p:txBody>
@@ -7261,7 +7569,7 @@
                 </a:solidFill>
                 <a:latin typeface="Aptos"/>
               </a:rPr>
-              <a:t>Each group then re-runs the same workflow on their own family's mini-bundle.</a:t>
+              <a:t>After Part 1, every group builds a bundle of this shape for their own family.</a:t>
             </a:r>
           </a:p>
         </p:txBody>
@@ -8417,7 +8725,7 @@
                 </a:solidFill>
                 <a:latin typeface="Georgia"/>
               </a:rPr>
-              <a:t>Part 2 — bring the tree back</a:t>
+              <a:t>Now you build your bundle</a:t>
             </a:r>
           </a:p>
         </p:txBody>
@@ -8430,8 +8738,8 @@
         </p:nvSpPr>
         <p:spPr>
           <a:xfrm>
-            <a:off x="640080" y="1691640"/>
-            <a:ext cx="10972800" cy="502920"/>
+            <a:off x="530352" y="914400"/>
+            <a:ext cx="10789920" cy="365760"/>
           </a:xfrm>
           <a:prstGeom prst="rect">
             <a:avLst/>
@@ -8446,13 +8754,13 @@
           <a:p>
             <a:pPr algn="l"/>
             <a:r>
-              <a:rPr sz="2200" b="0" i="0">
-                <a:solidFill>
-                  <a:srgbClr val="F6F6F8"/>
+              <a:rPr sz="1800" b="0" i="0">
+                <a:solidFill>
+                  <a:srgbClr val="D4A853"/>
                 </a:solidFill>
                 <a:latin typeface="Aptos"/>
               </a:rPr>
-              <a:t>Closely related species share trait values because they share genes.</a:t>
+              <a:t>15 min on FishView · same login as Demo 7</a:t>
             </a:r>
           </a:p>
         </p:txBody>
@@ -8465,8 +8773,95 @@
         </p:nvSpPr>
         <p:spPr>
           <a:xfrm>
-            <a:off x="640080" y="2468880"/>
-            <a:ext cx="10972800" cy="411480"/>
+            <a:off x="822960" y="1783080"/>
+            <a:ext cx="10515600" cy="3840480"/>
+          </a:xfrm>
+          <a:prstGeom prst="rect">
+            <a:avLst/>
+          </a:prstGeom>
+          <a:noFill/>
+        </p:spPr>
+        <p:txBody>
+          <a:bodyPr wrap="square">
+            <a:spAutoFit/>
+          </a:bodyPr>
+          <a:lstStyle/>
+          <a:p>
+            <a:pPr algn="l">
+              <a:spcAft>
+                <a:spcPts val="1200"/>
+              </a:spcAft>
+              <a:defRPr sz="2400">
+                <a:solidFill>
+                  <a:srgbClr val="F6F6F8"/>
+                </a:solidFill>
+                <a:latin typeface="Aptos"/>
+              </a:defRPr>
+            </a:pPr>
+            <a:r>
+              <a:t>Pick ≥ 15 species across ≥ 5 genera from your family</a:t>
+            </a:r>
+          </a:p>
+          <a:p>
+            <a:pPr algn="l">
+              <a:spcAft>
+                <a:spcPts val="1200"/>
+              </a:spcAft>
+              <a:defRPr sz="2400">
+                <a:solidFill>
+                  <a:srgbClr val="F6F6F8"/>
+                </a:solidFill>
+                <a:latin typeface="Aptos"/>
+              </a:defRPr>
+            </a:pPr>
+            <a:r>
+              <a:t>Star one exemplar image per species</a:t>
+            </a:r>
+          </a:p>
+          <a:p>
+            <a:pPr algn="l">
+              <a:spcAft>
+                <a:spcPts val="1200"/>
+              </a:spcAft>
+              <a:defRPr sz="2400">
+                <a:solidFill>
+                  <a:srgbClr val="F6F6F8"/>
+                </a:solidFill>
+                <a:latin typeface="Aptos"/>
+              </a:defRPr>
+            </a:pPr>
+            <a:r>
+              <a:t>Mark ONE species as the error-species → tick 5 images for it</a:t>
+            </a:r>
+          </a:p>
+          <a:p>
+            <a:pPr algn="l">
+              <a:spcAft>
+                <a:spcPts val="1200"/>
+              </a:spcAft>
+              <a:defRPr sz="2400">
+                <a:solidFill>
+                  <a:srgbClr val="F6F6F8"/>
+                </a:solidFill>
+                <a:latin typeface="Aptos"/>
+              </a:defRPr>
+            </a:pPr>
+            <a:r>
+              <a:t>Hit Export. Drop the ZIP next to your Chaetodontidae bundle.</a:t>
+            </a:r>
+          </a:p>
+        </p:txBody>
+      </p:sp>
+      <p:sp>
+        <p:nvSpPr>
+          <p:cNvPr id="6" name="TextBox 5"/>
+          <p:cNvSpPr txBox="1"/>
+          <p:nvPr/>
+        </p:nvSpPr>
+        <p:spPr>
+          <a:xfrm>
+            <a:off x="640080" y="5532120"/>
+            <a:ext cx="10972800" cy="502920"/>
           </a:xfrm>
           <a:prstGeom prst="rect">
             <a:avLst/>
@@ -8479,86 +8874,15 @@
           </a:bodyPr>
           <a:lstStyle/>
           <a:p>
-            <a:pPr algn="l"/>
-            <a:r>
-              <a:rPr sz="2000" b="0" i="0">
-                <a:solidFill>
-                  <a:srgbClr val="C4C6D0"/>
+            <a:pPr algn="ctr"/>
+            <a:r>
+              <a:rPr sz="2200" b="0" i="1">
+                <a:solidFill>
+                  <a:srgbClr val="E07A5F"/>
                 </a:solidFill>
                 <a:latin typeface="Aptos"/>
               </a:rPr>
-              <a:t>Three corrections, in order:</a:t>
-            </a:r>
-          </a:p>
-        </p:txBody>
-      </p:sp>
-      <p:sp>
-        <p:nvSpPr>
-          <p:cNvPr id="6" name="TextBox 5"/>
-          <p:cNvSpPr txBox="1"/>
-          <p:nvPr/>
-        </p:nvSpPr>
-        <p:spPr>
-          <a:xfrm>
-            <a:off x="914400" y="3108960"/>
-            <a:ext cx="10515600" cy="2560320"/>
-          </a:xfrm>
-          <a:prstGeom prst="rect">
-            <a:avLst/>
-          </a:prstGeom>
-          <a:noFill/>
-        </p:spPr>
-        <p:txBody>
-          <a:bodyPr wrap="square">
-            <a:spAutoFit/>
-          </a:bodyPr>
-          <a:lstStyle/>
-          <a:p>
-            <a:pPr algn="l">
-              <a:spcAft>
-                <a:spcPts val="1120"/>
-              </a:spcAft>
-              <a:defRPr sz="2400">
-                <a:solidFill>
-                  <a:srgbClr val="D4A853"/>
-                </a:solidFill>
-                <a:latin typeface="Aptos"/>
-              </a:defRPr>
-            </a:pPr>
-            <a:r>
-              <a:t>phyl.pca   — PCA reweighted by the tree's variance-covariance</a:t>
-            </a:r>
-          </a:p>
-          <a:p>
-            <a:pPr algn="l">
-              <a:spcAft>
-                <a:spcPts val="1120"/>
-              </a:spcAft>
-              <a:defRPr sz="2400">
-                <a:solidFill>
-                  <a:srgbClr val="D4A853"/>
-                </a:solidFill>
-                <a:latin typeface="Aptos"/>
-              </a:defRPr>
-            </a:pPr>
-            <a:r>
-              <a:t>PGLS       — bivariate regression where residuals can correlate via the tree</a:t>
-            </a:r>
-          </a:p>
-          <a:p>
-            <a:pPr algn="l">
-              <a:spcAft>
-                <a:spcPts val="1120"/>
-              </a:spcAft>
-              <a:defRPr sz="2400">
-                <a:solidFill>
-                  <a:srgbClr val="D4A853"/>
-                </a:solidFill>
-                <a:latin typeface="Aptos"/>
-              </a:defRPr>
-            </a:pPr>
-            <a:r>
-              <a:t>K and λ    — phylogenetic signal, per variable</a:t>
+              <a:t>The choices you make here ARE the analysis.</a:t>
             </a:r>
           </a:p>
         </p:txBody>
@@ -8571,7 +8895,7 @@
         </p:nvSpPr>
         <p:spPr>
           <a:xfrm>
-            <a:off x="640080" y="5852160"/>
+            <a:off x="640080" y="6035040"/>
             <a:ext cx="10972800" cy="365760"/>
           </a:xfrm>
           <a:prstGeom prst="rect">
@@ -8585,15 +8909,15 @@
           </a:bodyPr>
           <a:lstStyle/>
           <a:p>
-            <a:pPr algn="l"/>
+            <a:pPr algn="ctr"/>
             <a:r>
               <a:rPr sz="1800" b="0" i="1">
                 <a:solidFill>
-                  <a:srgbClr val="81B29A"/>
+                  <a:srgbClr val="C4C6D0"/>
                 </a:solidFill>
                 <a:latin typeface="Aptos"/>
               </a:rPr>
-              <a:t>Same questions as Part 1. Different answer if phylogeny was driving things.</a:t>
+              <a:t>Pick the species and the photos you'd defend in a paper.</a:t>
             </a:r>
           </a:p>
         </p:txBody>

--- a/demo8/slides/demo8-intro-slides.pptx
+++ b/demo8/slides/demo8-intro-slides.pptx
@@ -3744,8 +3744,8 @@
         </p:blipFill>
         <p:spPr>
           <a:xfrm>
-            <a:off x="2651760" y="1417320"/>
-            <a:ext cx="6583680" cy="4937760"/>
+            <a:off x="2769325" y="1417320"/>
+            <a:ext cx="6348548" cy="4937760"/>
           </a:xfrm>
           <a:prstGeom prst="rect">
             <a:avLst/>
@@ -8063,8 +8063,8 @@
         </p:blipFill>
         <p:spPr>
           <a:xfrm>
-            <a:off x="2651760" y="1417320"/>
-            <a:ext cx="6583680" cy="4937760"/>
+            <a:off x="2769325" y="1417320"/>
+            <a:ext cx="6348548" cy="4937760"/>
           </a:xfrm>
           <a:prstGeom prst="rect">
             <a:avLst/>
@@ -8254,8 +8254,8 @@
         </p:blipFill>
         <p:spPr>
           <a:xfrm>
-            <a:off x="2651760" y="1417320"/>
-            <a:ext cx="6583680" cy="4937760"/>
+            <a:off x="2769325" y="1417320"/>
+            <a:ext cx="6348548" cy="4937760"/>
           </a:xfrm>
           <a:prstGeom prst="rect">
             <a:avLst/>

--- a/demo8/slides/demo8-intro-slides.pptx
+++ b/demo8/slides/demo8-intro-slides.pptx
@@ -3723,7 +3723,7 @@
                 </a:solidFill>
                 <a:latin typeface="Aptos"/>
               </a:rPr>
-              <a:t>p_4 and m_c dropped because the trait covariance is rank-deficient</a:t>
+              <a:t>same 6 variables · centering uses the tree's BM variance-covariance</a:t>
             </a:r>
           </a:p>
         </p:txBody>
@@ -7735,7 +7735,7 @@
                 </a:solidFill>
                 <a:latin typeface="Aptos"/>
               </a:rPr>
-              <a:t>9 pattern stats per species · pavo classify() + adjacent()</a:t>
+              <a:t>6 pattern stats per species · pavo classify() + adjacent()</a:t>
             </a:r>
           </a:p>
         </p:txBody>
@@ -7844,7 +7844,7 @@
               </a:defRPr>
             </a:pPr>
             <a:r>
-              <a:t>Watch for tight scatter:</a:t>
+              <a:t>Six full-rank descriptors:</a:t>
             </a:r>
           </a:p>
           <a:p>
@@ -7860,7 +7860,7 @@
               </a:defRPr>
             </a:pPr>
             <a:r>
-              <a:t>m, m_r, m_c all carry</a:t>
+              <a:t>m, A, Jc, Jt, m_dS, m_dL.</a:t>
             </a:r>
           </a:p>
           <a:p>
@@ -7875,8 +7875,53 @@
                 <a:latin typeface="Aptos"/>
               </a:defRPr>
             </a:pPr>
-            <a:r>
-              <a:t>the same information.</a:t>
+          </a:p>
+          <a:p>
+            <a:pPr algn="l">
+              <a:spcAft>
+                <a:spcPts val="880"/>
+              </a:spcAft>
+              <a:defRPr sz="1800">
+                <a:solidFill>
+                  <a:srgbClr val="C4C6D0"/>
+                </a:solidFill>
+                <a:latin typeface="Aptos"/>
+              </a:defRPr>
+            </a:pPr>
+            <a:r>
+              <a:t>Watch for tight scatter:</a:t>
+            </a:r>
+          </a:p>
+          <a:p>
+            <a:pPr algn="l">
+              <a:spcAft>
+                <a:spcPts val="880"/>
+              </a:spcAft>
+              <a:defRPr sz="1800">
+                <a:solidFill>
+                  <a:srgbClr val="C4C6D0"/>
+                </a:solidFill>
+                <a:latin typeface="Aptos"/>
+              </a:defRPr>
+            </a:pPr>
+            <a:r>
+              <a:t>redundant axes → fewer</a:t>
+            </a:r>
+          </a:p>
+          <a:p>
+            <a:pPr algn="l">
+              <a:spcAft>
+                <a:spcPts val="880"/>
+              </a:spcAft>
+              <a:defRPr sz="1800">
+                <a:solidFill>
+                  <a:srgbClr val="C4C6D0"/>
+                </a:solidFill>
+                <a:latin typeface="Aptos"/>
+              </a:defRPr>
+            </a:pPr>
+            <a:r>
+              <a:t>real pattern dimensions.</a:t>
             </a:r>
           </a:p>
         </p:txBody>

--- a/demo8/slides/demo8-intro-slides.pptx
+++ b/demo8/slides/demo8-intro-slides.pptx
@@ -25,6 +25,7 @@
     <p:sldId id="273" r:id="rId24"/>
     <p:sldId id="274" r:id="rId25"/>
     <p:sldId id="275" r:id="rId26"/>
+    <p:sldId id="276" r:id="rId27"/>
   </p:sldIdLst>
   <p:sldSz cx="12191695" cy="6858000" type="screen4x3"/>
   <p:notesSz cx="6858000" cy="9144000"/>
@@ -5008,7 +5009,7 @@
                 </a:solidFill>
                 <a:latin typeface="Georgia"/>
               </a:rPr>
-              <a:t>Part 3 — admit you got the numbers from a photograph</a:t>
+              <a:t>Side trip: how we got the ecology data</a:t>
             </a:r>
           </a:p>
         </p:txBody>
@@ -5021,8 +5022,43 @@
         </p:nvSpPr>
         <p:spPr>
           <a:xfrm>
-            <a:off x="822960" y="2011680"/>
-            <a:ext cx="10515600" cy="3657600"/>
+            <a:off x="530352" y="914400"/>
+            <a:ext cx="10789920" cy="365760"/>
+          </a:xfrm>
+          <a:prstGeom prst="rect">
+            <a:avLst/>
+          </a:prstGeom>
+          <a:noFill/>
+        </p:spPr>
+        <p:txBody>
+          <a:bodyPr wrap="square" anchor="t">
+            <a:spAutoFit/>
+          </a:bodyPr>
+          <a:lstStyle/>
+          <a:p>
+            <a:pPr algn="l"/>
+            <a:r>
+              <a:rPr sz="1800" b="0" i="0">
+                <a:solidFill>
+                  <a:srgbClr val="D4A853"/>
+                </a:solidFill>
+                <a:latin typeface="Aptos"/>
+              </a:rPr>
+              <a:t>§2.8 walkthrough · rfishbase 3.1.10</a:t>
+            </a:r>
+          </a:p>
+        </p:txBody>
+      </p:sp>
+      <p:sp>
+        <p:nvSpPr>
+          <p:cNvPr id="5" name="TextBox 4"/>
+          <p:cNvSpPr txBox="1"/>
+          <p:nvPr/>
+        </p:nvSpPr>
+        <p:spPr>
+          <a:xfrm>
+            <a:off x="822960" y="1691640"/>
+            <a:ext cx="10515600" cy="2743200"/>
           </a:xfrm>
           <a:prstGeom prst="rect">
             <a:avLst/>
@@ -5039,7 +5075,7 @@
               <a:spcAft>
                 <a:spcPts val="1120"/>
               </a:spcAft>
-              <a:defRPr sz="2600">
+              <a:defRPr sz="2200">
                 <a:solidFill>
                   <a:srgbClr val="F6F6F8"/>
                 </a:solidFill>
@@ -5047,7 +5083,7 @@
               </a:defRPr>
             </a:pPr>
             <a:r>
-              <a:t>Pick one species. Photograph it five times.</a:t>
+              <a:t>Trophic level, depth, body size, vulnerability all came from FishBase.</a:t>
             </a:r>
           </a:p>
           <a:p>
@@ -5055,7 +5091,7 @@
               <a:spcAft>
                 <a:spcPts val="1120"/>
               </a:spcAft>
-              <a:defRPr sz="2600">
+              <a:defRPr sz="2200">
                 <a:solidFill>
                   <a:srgbClr val="F6F6F8"/>
                 </a:solidFill>
@@ -5063,7 +5099,7 @@
               </a:defRPr>
             </a:pPr>
             <a:r>
-              <a:t>Compute pavo on each photo.</a:t>
+              <a:t>Worksheet §2.8 shows you the rfishbase calls that built species_traits.csv.</a:t>
             </a:r>
           </a:p>
           <a:p>
@@ -5071,7 +5107,7 @@
               <a:spcAft>
                 <a:spcPts val="1120"/>
               </a:spcAft>
-              <a:defRPr sz="2600">
+              <a:defRPr sz="2200">
                 <a:solidFill>
                   <a:srgbClr val="F6F6F8"/>
                 </a:solidFill>
@@ -5079,50 +5115,21 @@
               </a:defRPr>
             </a:pPr>
             <a:r>
-              <a:t>The spread is your measurement noise.</a:t>
-            </a:r>
-          </a:p>
-          <a:p>
-            <a:pPr algn="l">
-              <a:spcAft>
-                <a:spcPts val="1120"/>
-              </a:spcAft>
-              <a:defRPr sz="2600">
-                <a:solidFill>
-                  <a:srgbClr val="F6F6F8"/>
-                </a:solidFill>
-                <a:latin typeface="Aptos"/>
-              </a:defRPr>
-            </a:pPr>
-          </a:p>
-          <a:p>
-            <a:pPr algn="l">
-              <a:spcAft>
-                <a:spcPts val="1120"/>
-              </a:spcAft>
-              <a:defRPr sz="2600">
-                <a:solidFill>
-                  <a:srgbClr val="F6F6F8"/>
-                </a:solidFill>
-                <a:latin typeface="Aptos"/>
-              </a:defRPr>
-            </a:pPr>
-            <a:r>
-              <a:t>Now ask: how much of Part 2 survives noise of that size?</a:t>
-            </a:r>
-          </a:p>
-        </p:txBody>
-      </p:sp>
-      <p:sp>
-        <p:nvSpPr>
-          <p:cNvPr id="5" name="TextBox 4"/>
+              <a:t>Same recipe runs unchanged on your family's tip labels.</a:t>
+            </a:r>
+          </a:p>
+        </p:txBody>
+      </p:sp>
+      <p:sp>
+        <p:nvSpPr>
+          <p:cNvPr id="6" name="TextBox 5"/>
           <p:cNvSpPr txBox="1"/>
           <p:nvPr/>
         </p:nvSpPr>
         <p:spPr>
           <a:xfrm>
-            <a:off x="822960" y="5669280"/>
-            <a:ext cx="10972800" cy="457200"/>
+            <a:off x="822960" y="4206240"/>
+            <a:ext cx="10515600" cy="1463040"/>
           </a:xfrm>
           <a:prstGeom prst="rect">
             <a:avLst/>
@@ -5137,20 +5144,57 @@
           <a:p>
             <a:pPr algn="l"/>
             <a:r>
-              <a:rPr sz="2000" b="0" i="1">
-                <a:solidFill>
-                  <a:srgbClr val="D4A853"/>
-                </a:solidFill>
-                <a:latin typeface="Aptos"/>
+              <a:rPr sz="1500" b="0" i="0">
+                <a:solidFill>
+                  <a:srgbClr val="81B29A"/>
+                </a:solidFill>
+                <a:latin typeface="Menlo"/>
               </a:rPr>
-              <a:t>Monte Carlo: re-run Parts 1 &amp; 2 a hundred times under that noise.</a:t>
-            </a:r>
-          </a:p>
-        </p:txBody>
-      </p:sp>
-      <p:sp>
-        <p:nvSpPr>
-          <p:cNvPr id="6" name="TextBox 5"/>
+              <a:t>species_fb &lt;- gsub("_", " ", species)
+sp &lt;- species(species_fb,  fields = c("Length", "DepthRangeDeep", "Vulnerability"))
+ec &lt;- ecology(species_fb,  fields = c("FoodTroph", "DietTroph"))</a:t>
+            </a:r>
+          </a:p>
+        </p:txBody>
+      </p:sp>
+      <p:sp>
+        <p:nvSpPr>
+          <p:cNvPr id="7" name="TextBox 6"/>
+          <p:cNvSpPr txBox="1"/>
+          <p:nvPr/>
+        </p:nvSpPr>
+        <p:spPr>
+          <a:xfrm>
+            <a:off x="822960" y="5989320"/>
+            <a:ext cx="10972800" cy="365760"/>
+          </a:xfrm>
+          <a:prstGeom prst="rect">
+            <a:avLst/>
+          </a:prstGeom>
+          <a:noFill/>
+        </p:spPr>
+        <p:txBody>
+          <a:bodyPr wrap="square" anchor="t">
+            <a:spAutoFit/>
+          </a:bodyPr>
+          <a:lstStyle/>
+          <a:p>
+            <a:pPr algn="l"/>
+            <a:r>
+              <a:rPr sz="1600" b="0" i="1">
+                <a:solidFill>
+                  <a:srgbClr val="C4C6D0"/>
+                </a:solidFill>
+                <a:latin typeface="Aptos"/>
+              </a:rPr>
+              <a:t>Pinned to rfishbase 3.1.10 — newer releases depend on duckdb and fail to build.</a:t>
+            </a:r>
+          </a:p>
+        </p:txBody>
+      </p:sp>
+      <p:sp>
+        <p:nvSpPr>
+          <p:cNvPr id="8" name="TextBox 7"/>
           <p:cNvSpPr txBox="1"/>
           <p:nvPr/>
         </p:nvSpPr>
@@ -5274,7 +5318,7 @@
                 </a:solidFill>
                 <a:latin typeface="Georgia"/>
               </a:rPr>
-              <a:t>Within-species noise — Heniochus_acuminatus × 5 images</a:t>
+              <a:t>Part 3 — admit you got the numbers from a photograph</a:t>
             </a:r>
           </a:p>
         </p:txBody>
@@ -5287,8 +5331,108 @@
         </p:nvSpPr>
         <p:spPr>
           <a:xfrm>
-            <a:off x="530352" y="914400"/>
-            <a:ext cx="10789920" cy="365760"/>
+            <a:off x="822960" y="2011680"/>
+            <a:ext cx="10515600" cy="3657600"/>
+          </a:xfrm>
+          <a:prstGeom prst="rect">
+            <a:avLst/>
+          </a:prstGeom>
+          <a:noFill/>
+        </p:spPr>
+        <p:txBody>
+          <a:bodyPr wrap="square">
+            <a:spAutoFit/>
+          </a:bodyPr>
+          <a:lstStyle/>
+          <a:p>
+            <a:pPr algn="l">
+              <a:spcAft>
+                <a:spcPts val="1120"/>
+              </a:spcAft>
+              <a:defRPr sz="2600">
+                <a:solidFill>
+                  <a:srgbClr val="F6F6F8"/>
+                </a:solidFill>
+                <a:latin typeface="Aptos"/>
+              </a:defRPr>
+            </a:pPr>
+            <a:r>
+              <a:t>Pick one species. Photograph it five times.</a:t>
+            </a:r>
+          </a:p>
+          <a:p>
+            <a:pPr algn="l">
+              <a:spcAft>
+                <a:spcPts val="1120"/>
+              </a:spcAft>
+              <a:defRPr sz="2600">
+                <a:solidFill>
+                  <a:srgbClr val="F6F6F8"/>
+                </a:solidFill>
+                <a:latin typeface="Aptos"/>
+              </a:defRPr>
+            </a:pPr>
+            <a:r>
+              <a:t>Compute pavo on each photo.</a:t>
+            </a:r>
+          </a:p>
+          <a:p>
+            <a:pPr algn="l">
+              <a:spcAft>
+                <a:spcPts val="1120"/>
+              </a:spcAft>
+              <a:defRPr sz="2600">
+                <a:solidFill>
+                  <a:srgbClr val="F6F6F8"/>
+                </a:solidFill>
+                <a:latin typeface="Aptos"/>
+              </a:defRPr>
+            </a:pPr>
+            <a:r>
+              <a:t>The spread is your measurement noise.</a:t>
+            </a:r>
+          </a:p>
+          <a:p>
+            <a:pPr algn="l">
+              <a:spcAft>
+                <a:spcPts val="1120"/>
+              </a:spcAft>
+              <a:defRPr sz="2600">
+                <a:solidFill>
+                  <a:srgbClr val="F6F6F8"/>
+                </a:solidFill>
+                <a:latin typeface="Aptos"/>
+              </a:defRPr>
+            </a:pPr>
+          </a:p>
+          <a:p>
+            <a:pPr algn="l">
+              <a:spcAft>
+                <a:spcPts val="1120"/>
+              </a:spcAft>
+              <a:defRPr sz="2600">
+                <a:solidFill>
+                  <a:srgbClr val="F6F6F8"/>
+                </a:solidFill>
+                <a:latin typeface="Aptos"/>
+              </a:defRPr>
+            </a:pPr>
+            <a:r>
+              <a:t>Now ask: how much of Part 2 survives noise of that size?</a:t>
+            </a:r>
+          </a:p>
+        </p:txBody>
+      </p:sp>
+      <p:sp>
+        <p:nvSpPr>
+          <p:cNvPr id="5" name="TextBox 4"/>
+          <p:cNvSpPr txBox="1"/>
+          <p:nvPr/>
+        </p:nvSpPr>
+        <p:spPr>
+          <a:xfrm>
+            <a:off x="822960" y="5669280"/>
+            <a:ext cx="10972800" cy="457200"/>
           </a:xfrm>
           <a:prstGeom prst="rect">
             <a:avLst/>
@@ -5303,193 +5447,20 @@
           <a:p>
             <a:pPr algn="l"/>
             <a:r>
-              <a:rPr sz="1800" b="0" i="0">
+              <a:rPr sz="2000" b="0" i="1">
                 <a:solidFill>
                   <a:srgbClr val="D4A853"/>
                 </a:solidFill>
                 <a:latin typeface="Aptos"/>
               </a:rPr>
-              <a:t>five dots per variable; bar = mean</a:t>
-            </a:r>
-          </a:p>
-        </p:txBody>
-      </p:sp>
-      <p:pic>
-        <p:nvPicPr>
-          <p:cNvPr id="5" name="Picture 4" descr="error-strip-1.png"/>
-          <p:cNvPicPr>
-            <a:picLocks noChangeAspect="1"/>
-          </p:cNvPicPr>
-          <p:nvPr/>
-        </p:nvPicPr>
-        <p:blipFill>
-          <a:blip r:embed="rId2"/>
-          <a:stretch>
-            <a:fillRect/>
-          </a:stretch>
-        </p:blipFill>
-        <p:spPr>
-          <a:xfrm>
-            <a:off x="640080" y="1571625"/>
-            <a:ext cx="8229600" cy="4629150"/>
-          </a:xfrm>
-          <a:prstGeom prst="rect">
-            <a:avLst/>
-          </a:prstGeom>
-          <a:effectLst/>
-        </p:spPr>
-      </p:pic>
+              <a:t>Monte Carlo: re-run Parts 1 &amp; 2 a hundred times under that noise.</a:t>
+            </a:r>
+          </a:p>
+        </p:txBody>
+      </p:sp>
       <p:sp>
         <p:nvSpPr>
           <p:cNvPr id="6" name="TextBox 5"/>
-          <p:cNvSpPr txBox="1"/>
-          <p:nvPr/>
-        </p:nvSpPr>
-        <p:spPr>
-          <a:xfrm>
-            <a:off x="9052560" y="1828800"/>
-            <a:ext cx="2926080" cy="4389120"/>
-          </a:xfrm>
-          <a:prstGeom prst="rect">
-            <a:avLst/>
-          </a:prstGeom>
-          <a:noFill/>
-        </p:spPr>
-        <p:txBody>
-          <a:bodyPr wrap="square">
-            <a:spAutoFit/>
-          </a:bodyPr>
-          <a:lstStyle/>
-          <a:p>
-            <a:pPr algn="l">
-              <a:spcAft>
-                <a:spcPts val="880"/>
-              </a:spcAft>
-              <a:defRPr sz="1800">
-                <a:solidFill>
-                  <a:srgbClr val="C4C6D0"/>
-                </a:solidFill>
-                <a:latin typeface="Aptos"/>
-              </a:defRPr>
-            </a:pPr>
-            <a:r>
-              <a:t>Tight clusters</a:t>
-            </a:r>
-          </a:p>
-          <a:p>
-            <a:pPr algn="l">
-              <a:spcAft>
-                <a:spcPts val="880"/>
-              </a:spcAft>
-              <a:defRPr sz="1800">
-                <a:solidFill>
-                  <a:srgbClr val="C4C6D0"/>
-                </a:solidFill>
-                <a:latin typeface="Aptos"/>
-              </a:defRPr>
-            </a:pPr>
-            <a:r>
-              <a:t>→ pavo is</a:t>
-            </a:r>
-          </a:p>
-          <a:p>
-            <a:pPr algn="l">
-              <a:spcAft>
-                <a:spcPts val="880"/>
-              </a:spcAft>
-              <a:defRPr sz="1800">
-                <a:solidFill>
-                  <a:srgbClr val="C4C6D0"/>
-                </a:solidFill>
-                <a:latin typeface="Aptos"/>
-              </a:defRPr>
-            </a:pPr>
-            <a:r>
-              <a:t>  reliable.</a:t>
-            </a:r>
-          </a:p>
-          <a:p>
-            <a:pPr algn="l">
-              <a:spcAft>
-                <a:spcPts val="880"/>
-              </a:spcAft>
-              <a:defRPr sz="1800">
-                <a:solidFill>
-                  <a:srgbClr val="C4C6D0"/>
-                </a:solidFill>
-                <a:latin typeface="Aptos"/>
-              </a:defRPr>
-            </a:pPr>
-          </a:p>
-          <a:p>
-            <a:pPr algn="l">
-              <a:spcAft>
-                <a:spcPts val="880"/>
-              </a:spcAft>
-              <a:defRPr sz="1800">
-                <a:solidFill>
-                  <a:srgbClr val="C4C6D0"/>
-                </a:solidFill>
-                <a:latin typeface="Aptos"/>
-              </a:defRPr>
-            </a:pPr>
-            <a:r>
-              <a:t>Wide spread</a:t>
-            </a:r>
-          </a:p>
-          <a:p>
-            <a:pPr algn="l">
-              <a:spcAft>
-                <a:spcPts val="880"/>
-              </a:spcAft>
-              <a:defRPr sz="1800">
-                <a:solidFill>
-                  <a:srgbClr val="C4C6D0"/>
-                </a:solidFill>
-                <a:latin typeface="Aptos"/>
-              </a:defRPr>
-            </a:pPr>
-            <a:r>
-              <a:t>→ that variable's</a:t>
-            </a:r>
-          </a:p>
-          <a:p>
-            <a:pPr algn="l">
-              <a:spcAft>
-                <a:spcPts val="880"/>
-              </a:spcAft>
-              <a:defRPr sz="1800">
-                <a:solidFill>
-                  <a:srgbClr val="C4C6D0"/>
-                </a:solidFill>
-                <a:latin typeface="Aptos"/>
-              </a:defRPr>
-            </a:pPr>
-            <a:r>
-              <a:t>  Part 2 result</a:t>
-            </a:r>
-          </a:p>
-          <a:p>
-            <a:pPr algn="l">
-              <a:spcAft>
-                <a:spcPts val="880"/>
-              </a:spcAft>
-              <a:defRPr sz="1800">
-                <a:solidFill>
-                  <a:srgbClr val="C4C6D0"/>
-                </a:solidFill>
-                <a:latin typeface="Aptos"/>
-              </a:defRPr>
-            </a:pPr>
-            <a:r>
-              <a:t>  is fragile.</a:t>
-            </a:r>
-          </a:p>
-        </p:txBody>
-      </p:sp>
-      <p:sp>
-        <p:nvSpPr>
-          <p:cNvPr id="7" name="TextBox 6"/>
           <p:cNvSpPr txBox="1"/>
           <p:nvPr/>
         </p:nvSpPr>
@@ -5613,7 +5584,7 @@
                 </a:solidFill>
                 <a:latin typeface="Georgia"/>
               </a:rPr>
-              <a:t>K under noise — 100 Monte Carlo re-fits</a:t>
+              <a:t>Within-species noise — Heniochus_acuminatus × 5 images</a:t>
             </a:r>
           </a:p>
         </p:txBody>
@@ -5648,14 +5619,14 @@
                 </a:solidFill>
                 <a:latin typeface="Aptos"/>
               </a:rPr>
-              <a:t>gold dot = observed K (Part 2)</a:t>
+              <a:t>five dots per variable; bar = mean</a:t>
             </a:r>
           </a:p>
         </p:txBody>
       </p:sp>
       <p:pic>
         <p:nvPicPr>
-          <p:cNvPr id="5" name="Picture 4" descr="mc-K-plot-1.png"/>
+          <p:cNvPr id="5" name="Picture 4" descr="error-strip-1.png"/>
           <p:cNvPicPr>
             <a:picLocks noChangeAspect="1"/>
           </p:cNvPicPr>
@@ -5669,8 +5640,8 @@
         </p:blipFill>
         <p:spPr>
           <a:xfrm>
-            <a:off x="804671" y="1417320"/>
-            <a:ext cx="7900416" cy="4937760"/>
+            <a:off x="640080" y="1571625"/>
+            <a:ext cx="8229600" cy="4629150"/>
           </a:xfrm>
           <a:prstGeom prst="rect">
             <a:avLst/>
@@ -5712,7 +5683,7 @@
               </a:defRPr>
             </a:pPr>
             <a:r>
-              <a:t>Gold inside the</a:t>
+              <a:t>Tight clusters</a:t>
             </a:r>
           </a:p>
           <a:p>
@@ -5728,7 +5699,7 @@
               </a:defRPr>
             </a:pPr>
             <a:r>
-              <a:t>box: robust.</a:t>
+              <a:t>→ pavo is</a:t>
             </a:r>
           </a:p>
           <a:p>
@@ -5743,6 +5714,9 @@
                 <a:latin typeface="Aptos"/>
               </a:defRPr>
             </a:pPr>
+            <a:r>
+              <a:t>  reliable.</a:t>
+            </a:r>
           </a:p>
           <a:p>
             <a:pPr algn="l">
@@ -5756,9 +5730,6 @@
                 <a:latin typeface="Aptos"/>
               </a:defRPr>
             </a:pPr>
-            <a:r>
-              <a:t>Gold outside:</a:t>
-            </a:r>
           </a:p>
           <a:p>
             <a:pPr algn="l">
@@ -5773,7 +5744,7 @@
               </a:defRPr>
             </a:pPr>
             <a:r>
-              <a:t>you got lucky —</a:t>
+              <a:t>Wide spread</a:t>
             </a:r>
           </a:p>
           <a:p>
@@ -5789,7 +5760,7 @@
               </a:defRPr>
             </a:pPr>
             <a:r>
-              <a:t>a different photo</a:t>
+              <a:t>→ that variable's</a:t>
             </a:r>
           </a:p>
           <a:p>
@@ -5805,7 +5776,7 @@
               </a:defRPr>
             </a:pPr>
             <a:r>
-              <a:t>would have given</a:t>
+              <a:t>  Part 2 result</a:t>
             </a:r>
           </a:p>
           <a:p>
@@ -5821,7 +5792,7 @@
               </a:defRPr>
             </a:pPr>
             <a:r>
-              <a:t>a different K.</a:t>
+              <a:t>  is fragile.</a:t>
             </a:r>
           </a:p>
         </p:txBody>
@@ -5952,7 +5923,7 @@
                 </a:solidFill>
                 <a:latin typeface="Georgia"/>
               </a:rPr>
-              <a:t>What you turn in</a:t>
+              <a:t>K under noise — 100 Monte Carlo re-fits</a:t>
             </a:r>
           </a:p>
         </p:txBody>
@@ -5987,21 +5958,46 @@
                 </a:solidFill>
                 <a:latin typeface="Aptos"/>
               </a:rPr>
-              <a:t>BruinLearn · end of day Wednesday</a:t>
-            </a:r>
-          </a:p>
-        </p:txBody>
-      </p:sp>
-      <p:sp>
-        <p:nvSpPr>
-          <p:cNvPr id="5" name="TextBox 4"/>
+              <a:t>gold dot = observed K (Part 2)</a:t>
+            </a:r>
+          </a:p>
+        </p:txBody>
+      </p:sp>
+      <p:pic>
+        <p:nvPicPr>
+          <p:cNvPr id="5" name="Picture 4" descr="mc-K-plot-1.png"/>
+          <p:cNvPicPr>
+            <a:picLocks noChangeAspect="1"/>
+          </p:cNvPicPr>
+          <p:nvPr/>
+        </p:nvPicPr>
+        <p:blipFill>
+          <a:blip r:embed="rId2"/>
+          <a:stretch>
+            <a:fillRect/>
+          </a:stretch>
+        </p:blipFill>
+        <p:spPr>
+          <a:xfrm>
+            <a:off x="804671" y="1417320"/>
+            <a:ext cx="7900416" cy="4937760"/>
+          </a:xfrm>
+          <a:prstGeom prst="rect">
+            <a:avLst/>
+          </a:prstGeom>
+          <a:effectLst/>
+        </p:spPr>
+      </p:pic>
+      <p:sp>
+        <p:nvSpPr>
+          <p:cNvPr id="6" name="TextBox 5"/>
           <p:cNvSpPr txBox="1"/>
           <p:nvPr/>
         </p:nvSpPr>
         <p:spPr>
           <a:xfrm>
-            <a:off x="822960" y="1691640"/>
-            <a:ext cx="10515600" cy="4114800"/>
+            <a:off x="9052560" y="1828800"/>
+            <a:ext cx="2926080" cy="4389120"/>
           </a:xfrm>
           <a:prstGeom prst="rect">
             <a:avLst/>
@@ -6016,88 +6012,133 @@
           <a:p>
             <a:pPr algn="l">
               <a:spcAft>
-                <a:spcPts val="1200"/>
+                <a:spcPts val="880"/>
               </a:spcAft>
-              <a:defRPr sz="2400">
-                <a:solidFill>
-                  <a:srgbClr val="F6F6F8"/>
+              <a:defRPr sz="1800">
+                <a:solidFill>
+                  <a:srgbClr val="C4C6D0"/>
                 </a:solidFill>
                 <a:latin typeface="Aptos"/>
               </a:defRPr>
             </a:pPr>
             <a:r>
-              <a:t>1.  Part 1 PCA scatter — your family</a:t>
+              <a:t>Gold inside the</a:t>
             </a:r>
           </a:p>
           <a:p>
             <a:pPr algn="l">
               <a:spcAft>
-                <a:spcPts val="1200"/>
+                <a:spcPts val="880"/>
               </a:spcAft>
-              <a:defRPr sz="2400">
-                <a:solidFill>
-                  <a:srgbClr val="F6F6F8"/>
+              <a:defRPr sz="1800">
+                <a:solidFill>
+                  <a:srgbClr val="C4C6D0"/>
                 </a:solidFill>
                 <a:latin typeface="Aptos"/>
               </a:defRPr>
             </a:pPr>
             <a:r>
-              <a:t>2.  Part 2 K plot + one-line interpretation per variable</a:t>
+              <a:t>box: robust.</a:t>
             </a:r>
           </a:p>
           <a:p>
             <a:pPr algn="l">
               <a:spcAft>
-                <a:spcPts val="1200"/>
+                <a:spcPts val="880"/>
               </a:spcAft>
-              <a:defRPr sz="2400">
-                <a:solidFill>
-                  <a:srgbClr val="F6F6F8"/>
+              <a:defRPr sz="1800">
+                <a:solidFill>
+                  <a:srgbClr val="C4C6D0"/>
                 </a:solidFill>
                 <a:latin typeface="Aptos"/>
               </a:defRPr>
             </a:pPr>
-            <a:r>
-              <a:t>3.  Part 3 Monte-Carlo CI on one statistic of your choosing</a:t>
-            </a:r>
           </a:p>
           <a:p>
             <a:pPr algn="l">
               <a:spcAft>
-                <a:spcPts val="1200"/>
+                <a:spcPts val="880"/>
               </a:spcAft>
-              <a:defRPr sz="2400">
-                <a:solidFill>
-                  <a:srgbClr val="F6F6F8"/>
+              <a:defRPr sz="1800">
+                <a:solidFill>
+                  <a:srgbClr val="C4C6D0"/>
                 </a:solidFill>
                 <a:latin typeface="Aptos"/>
               </a:defRPr>
             </a:pPr>
             <a:r>
-              <a:t>4.  One paragraph (≤ 250 words): does color in your family match Frédérich,</a:t>
+              <a:t>Gold outside:</a:t>
             </a:r>
           </a:p>
           <a:p>
             <a:pPr algn="l">
               <a:spcAft>
-                <a:spcPts val="1200"/>
+                <a:spcPts val="880"/>
               </a:spcAft>
-              <a:defRPr sz="2400">
-                <a:solidFill>
-                  <a:srgbClr val="F6F6F8"/>
+              <a:defRPr sz="1800">
+                <a:solidFill>
+                  <a:srgbClr val="C4C6D0"/>
                 </a:solidFill>
                 <a:latin typeface="Aptos"/>
               </a:defRPr>
             </a:pPr>
             <a:r>
-              <a:t>     and which conclusions survive measurement error?</a:t>
-            </a:r>
-          </a:p>
-        </p:txBody>
-      </p:sp>
-      <p:sp>
-        <p:nvSpPr>
-          <p:cNvPr id="6" name="TextBox 5"/>
+              <a:t>you got lucky —</a:t>
+            </a:r>
+          </a:p>
+          <a:p>
+            <a:pPr algn="l">
+              <a:spcAft>
+                <a:spcPts val="880"/>
+              </a:spcAft>
+              <a:defRPr sz="1800">
+                <a:solidFill>
+                  <a:srgbClr val="C4C6D0"/>
+                </a:solidFill>
+                <a:latin typeface="Aptos"/>
+              </a:defRPr>
+            </a:pPr>
+            <a:r>
+              <a:t>a different photo</a:t>
+            </a:r>
+          </a:p>
+          <a:p>
+            <a:pPr algn="l">
+              <a:spcAft>
+                <a:spcPts val="880"/>
+              </a:spcAft>
+              <a:defRPr sz="1800">
+                <a:solidFill>
+                  <a:srgbClr val="C4C6D0"/>
+                </a:solidFill>
+                <a:latin typeface="Aptos"/>
+              </a:defRPr>
+            </a:pPr>
+            <a:r>
+              <a:t>would have given</a:t>
+            </a:r>
+          </a:p>
+          <a:p>
+            <a:pPr algn="l">
+              <a:spcAft>
+                <a:spcPts val="880"/>
+              </a:spcAft>
+              <a:defRPr sz="1800">
+                <a:solidFill>
+                  <a:srgbClr val="C4C6D0"/>
+                </a:solidFill>
+                <a:latin typeface="Aptos"/>
+              </a:defRPr>
+            </a:pPr>
+            <a:r>
+              <a:t>a different K.</a:t>
+            </a:r>
+          </a:p>
+        </p:txBody>
+      </p:sp>
+      <p:sp>
+        <p:nvSpPr>
+          <p:cNvPr id="7" name="TextBox 6"/>
           <p:cNvSpPr txBox="1"/>
           <p:nvPr/>
         </p:nvSpPr>
@@ -6221,7 +6262,7 @@
                 </a:solidFill>
                 <a:latin typeface="Georgia"/>
               </a:rPr>
-              <a:t>Tonight</a:t>
+              <a:t>What you turn in</a:t>
             </a:r>
           </a:p>
         </p:txBody>
@@ -6256,7 +6297,7 @@
                 </a:solidFill>
                 <a:latin typeface="Aptos"/>
               </a:rPr>
-              <a:t>prep page · ~20 minutes</a:t>
+              <a:t>BruinLearn · end of day Wednesday</a:t>
             </a:r>
           </a:p>
         </p:txBody>
@@ -6269,8 +6310,8 @@
         </p:nvSpPr>
         <p:spPr>
           <a:xfrm>
-            <a:off x="822960" y="1828800"/>
-            <a:ext cx="10515600" cy="3657600"/>
+            <a:off x="822960" y="1691640"/>
+            <a:ext cx="10515600" cy="4114800"/>
           </a:xfrm>
           <a:prstGeom prst="rect">
             <a:avLst/>
@@ -6295,7 +6336,7 @@
               </a:defRPr>
             </a:pPr>
             <a:r>
-              <a:t>1.  Install R packages (one chunk on the prep page)</a:t>
+              <a:t>1.  Part 1 PCA scatter — your family</a:t>
             </a:r>
           </a:p>
           <a:p>
@@ -6311,7 +6352,7 @@
               </a:defRPr>
             </a:pPr>
             <a:r>
-              <a:t>2.  Download the Chaetodontidae walkthrough bundle</a:t>
+              <a:t>2.  Part 2 K plot + one-line interpretation per variable</a:t>
             </a:r>
           </a:p>
           <a:p>
@@ -6327,7 +6368,7 @@
               </a:defRPr>
             </a:pPr>
             <a:r>
-              <a:t>3.  Run the readiness check until it prints PASS</a:t>
+              <a:t>3.  Part 3 Monte-Carlo CI on one statistic of your choosing</a:t>
             </a:r>
           </a:p>
           <a:p>
@@ -6343,7 +6384,23 @@
               </a:defRPr>
             </a:pPr>
             <a:r>
-              <a:t>4.  Confirm your Demo 7 FishView login still works — you'll build your bundle in class</a:t>
+              <a:t>4.  One paragraph (≤ 250 words): does color in your family match Frédérich,</a:t>
+            </a:r>
+          </a:p>
+          <a:p>
+            <a:pPr algn="l">
+              <a:spcAft>
+                <a:spcPts val="1200"/>
+              </a:spcAft>
+              <a:defRPr sz="2400">
+                <a:solidFill>
+                  <a:srgbClr val="F6F6F8"/>
+                </a:solidFill>
+                <a:latin typeface="Aptos"/>
+              </a:defRPr>
+            </a:pPr>
+            <a:r>
+              <a:t>     and which conclusions survive measurement error?</a:t>
             </a:r>
           </a:p>
         </p:txBody>
@@ -6351,41 +6408,6 @@
       <p:sp>
         <p:nvSpPr>
           <p:cNvPr id="6" name="TextBox 5"/>
-          <p:cNvSpPr txBox="1"/>
-          <p:nvPr/>
-        </p:nvSpPr>
-        <p:spPr>
-          <a:xfrm>
-            <a:off x="822960" y="5760720"/>
-            <a:ext cx="10972800" cy="457200"/>
-          </a:xfrm>
-          <a:prstGeom prst="rect">
-            <a:avLst/>
-          </a:prstGeom>
-          <a:noFill/>
-        </p:spPr>
-        <p:txBody>
-          <a:bodyPr wrap="square" anchor="t">
-            <a:spAutoFit/>
-          </a:bodyPr>
-          <a:lstStyle/>
-          <a:p>
-            <a:pPr algn="l"/>
-            <a:r>
-              <a:rPr sz="2200" b="0" i="0">
-                <a:solidFill>
-                  <a:srgbClr val="D4A853"/>
-                </a:solidFill>
-                <a:latin typeface="Aptos"/>
-              </a:rPr>
-              <a:t>michaelalfaro.github.io/eeb187-demos/demo8/demo8-prep.html</a:t>
-            </a:r>
-          </a:p>
-        </p:txBody>
-      </p:sp>
-      <p:sp>
-        <p:nvSpPr>
-          <p:cNvPr id="7" name="TextBox 6"/>
           <p:cNvSpPr txBox="1"/>
           <p:nvPr/>
         </p:nvSpPr>
@@ -6838,6 +6860,294 @@
 </file>
 
 <file path=ppt/slides/slide20.xml><?xml version="1.0" encoding="utf-8"?>
+<p:sld xmlns:a="http://schemas.openxmlformats.org/drawingml/2006/main" xmlns:p="http://schemas.openxmlformats.org/presentationml/2006/main" xmlns:r="http://schemas.openxmlformats.org/officeDocument/2006/relationships">
+  <p:cSld>
+    <p:spTree>
+      <p:nvGrpSpPr>
+        <p:cNvPr id="1" name=""/>
+        <p:cNvGrpSpPr/>
+        <p:nvPr/>
+      </p:nvGrpSpPr>
+      <p:grpSpPr/>
+      <p:sp>
+        <p:nvSpPr>
+          <p:cNvPr id="2" name="Rectangle 1"/>
+          <p:cNvSpPr/>
+          <p:nvPr/>
+        </p:nvSpPr>
+        <p:spPr>
+          <a:xfrm>
+            <a:off x="0" y="0"/>
+            <a:ext cx="12191695" cy="6858000"/>
+          </a:xfrm>
+          <a:prstGeom prst="rect">
+            <a:avLst/>
+          </a:prstGeom>
+          <a:solidFill>
+            <a:srgbClr val="181B2B"/>
+          </a:solidFill>
+          <a:ln>
+            <a:noFill/>
+          </a:ln>
+        </p:spPr>
+        <p:style>
+          <a:lnRef idx="1">
+            <a:schemeClr val="accent1"/>
+          </a:lnRef>
+          <a:fillRef idx="3">
+            <a:schemeClr val="accent1"/>
+          </a:fillRef>
+          <a:effectRef idx="2">
+            <a:schemeClr val="accent1"/>
+          </a:effectRef>
+          <a:fontRef idx="minor">
+            <a:schemeClr val="lt1"/>
+          </a:fontRef>
+        </p:style>
+        <p:txBody>
+          <a:bodyPr rtlCol="0" anchor="ctr"/>
+          <a:lstStyle/>
+          <a:p>
+            <a:pPr algn="ctr"/>
+          </a:p>
+        </p:txBody>
+      </p:sp>
+      <p:sp>
+        <p:nvSpPr>
+          <p:cNvPr id="3" name="TextBox 2"/>
+          <p:cNvSpPr txBox="1"/>
+          <p:nvPr/>
+        </p:nvSpPr>
+        <p:spPr>
+          <a:xfrm>
+            <a:off x="502920" y="256032"/>
+            <a:ext cx="11155680" cy="640080"/>
+          </a:xfrm>
+          <a:prstGeom prst="rect">
+            <a:avLst/>
+          </a:prstGeom>
+          <a:noFill/>
+        </p:spPr>
+        <p:txBody>
+          <a:bodyPr wrap="square" anchor="t">
+            <a:spAutoFit/>
+          </a:bodyPr>
+          <a:lstStyle/>
+          <a:p>
+            <a:pPr algn="l"/>
+            <a:r>
+              <a:rPr sz="3600" b="1" i="0">
+                <a:solidFill>
+                  <a:srgbClr val="F6F6F8"/>
+                </a:solidFill>
+                <a:latin typeface="Georgia"/>
+              </a:rPr>
+              <a:t>Tonight</a:t>
+            </a:r>
+          </a:p>
+        </p:txBody>
+      </p:sp>
+      <p:sp>
+        <p:nvSpPr>
+          <p:cNvPr id="4" name="TextBox 3"/>
+          <p:cNvSpPr txBox="1"/>
+          <p:nvPr/>
+        </p:nvSpPr>
+        <p:spPr>
+          <a:xfrm>
+            <a:off x="530352" y="914400"/>
+            <a:ext cx="10789920" cy="365760"/>
+          </a:xfrm>
+          <a:prstGeom prst="rect">
+            <a:avLst/>
+          </a:prstGeom>
+          <a:noFill/>
+        </p:spPr>
+        <p:txBody>
+          <a:bodyPr wrap="square" anchor="t">
+            <a:spAutoFit/>
+          </a:bodyPr>
+          <a:lstStyle/>
+          <a:p>
+            <a:pPr algn="l"/>
+            <a:r>
+              <a:rPr sz="1800" b="0" i="0">
+                <a:solidFill>
+                  <a:srgbClr val="D4A853"/>
+                </a:solidFill>
+                <a:latin typeface="Aptos"/>
+              </a:rPr>
+              <a:t>prep page · ~20 minutes</a:t>
+            </a:r>
+          </a:p>
+        </p:txBody>
+      </p:sp>
+      <p:sp>
+        <p:nvSpPr>
+          <p:cNvPr id="5" name="TextBox 4"/>
+          <p:cNvSpPr txBox="1"/>
+          <p:nvPr/>
+        </p:nvSpPr>
+        <p:spPr>
+          <a:xfrm>
+            <a:off x="822960" y="1828800"/>
+            <a:ext cx="10515600" cy="3657600"/>
+          </a:xfrm>
+          <a:prstGeom prst="rect">
+            <a:avLst/>
+          </a:prstGeom>
+          <a:noFill/>
+        </p:spPr>
+        <p:txBody>
+          <a:bodyPr wrap="square">
+            <a:spAutoFit/>
+          </a:bodyPr>
+          <a:lstStyle/>
+          <a:p>
+            <a:pPr algn="l">
+              <a:spcAft>
+                <a:spcPts val="1200"/>
+              </a:spcAft>
+              <a:defRPr sz="2400">
+                <a:solidFill>
+                  <a:srgbClr val="F6F6F8"/>
+                </a:solidFill>
+                <a:latin typeface="Aptos"/>
+              </a:defRPr>
+            </a:pPr>
+            <a:r>
+              <a:t>1.  Install R packages (one chunk on the prep page)</a:t>
+            </a:r>
+          </a:p>
+          <a:p>
+            <a:pPr algn="l">
+              <a:spcAft>
+                <a:spcPts val="1200"/>
+              </a:spcAft>
+              <a:defRPr sz="2400">
+                <a:solidFill>
+                  <a:srgbClr val="F6F6F8"/>
+                </a:solidFill>
+                <a:latin typeface="Aptos"/>
+              </a:defRPr>
+            </a:pPr>
+            <a:r>
+              <a:t>2.  Download the Chaetodontidae walkthrough bundle</a:t>
+            </a:r>
+          </a:p>
+          <a:p>
+            <a:pPr algn="l">
+              <a:spcAft>
+                <a:spcPts val="1200"/>
+              </a:spcAft>
+              <a:defRPr sz="2400">
+                <a:solidFill>
+                  <a:srgbClr val="F6F6F8"/>
+                </a:solidFill>
+                <a:latin typeface="Aptos"/>
+              </a:defRPr>
+            </a:pPr>
+            <a:r>
+              <a:t>3.  Run the readiness check until it prints PASS</a:t>
+            </a:r>
+          </a:p>
+          <a:p>
+            <a:pPr algn="l">
+              <a:spcAft>
+                <a:spcPts val="1200"/>
+              </a:spcAft>
+              <a:defRPr sz="2400">
+                <a:solidFill>
+                  <a:srgbClr val="F6F6F8"/>
+                </a:solidFill>
+                <a:latin typeface="Aptos"/>
+              </a:defRPr>
+            </a:pPr>
+            <a:r>
+              <a:t>4.  Confirm your Demo 7 FishView login still works — you'll build your bundle in class</a:t>
+            </a:r>
+          </a:p>
+        </p:txBody>
+      </p:sp>
+      <p:sp>
+        <p:nvSpPr>
+          <p:cNvPr id="6" name="TextBox 5"/>
+          <p:cNvSpPr txBox="1"/>
+          <p:nvPr/>
+        </p:nvSpPr>
+        <p:spPr>
+          <a:xfrm>
+            <a:off x="822960" y="5760720"/>
+            <a:ext cx="10972800" cy="457200"/>
+          </a:xfrm>
+          <a:prstGeom prst="rect">
+            <a:avLst/>
+          </a:prstGeom>
+          <a:noFill/>
+        </p:spPr>
+        <p:txBody>
+          <a:bodyPr wrap="square" anchor="t">
+            <a:spAutoFit/>
+          </a:bodyPr>
+          <a:lstStyle/>
+          <a:p>
+            <a:pPr algn="l"/>
+            <a:r>
+              <a:rPr sz="2200" b="0" i="0">
+                <a:solidFill>
+                  <a:srgbClr val="D4A853"/>
+                </a:solidFill>
+                <a:latin typeface="Aptos"/>
+              </a:rPr>
+              <a:t>michaelalfaro.github.io/eeb187-demos/demo8/demo8-prep.html</a:t>
+            </a:r>
+          </a:p>
+        </p:txBody>
+      </p:sp>
+      <p:sp>
+        <p:nvSpPr>
+          <p:cNvPr id="7" name="TextBox 6"/>
+          <p:cNvSpPr txBox="1"/>
+          <p:nvPr/>
+        </p:nvSpPr>
+        <p:spPr>
+          <a:xfrm>
+            <a:off x="502920" y="6510528"/>
+            <a:ext cx="6400800" cy="201168"/>
+          </a:xfrm>
+          <a:prstGeom prst="rect">
+            <a:avLst/>
+          </a:prstGeom>
+          <a:noFill/>
+        </p:spPr>
+        <p:txBody>
+          <a:bodyPr wrap="square" anchor="t">
+            <a:spAutoFit/>
+          </a:bodyPr>
+          <a:lstStyle/>
+          <a:p>
+            <a:pPr algn="l"/>
+            <a:r>
+              <a:rPr sz="1000" b="0" i="0">
+                <a:solidFill>
+                  <a:srgbClr val="9196A8"/>
+                </a:solidFill>
+                <a:latin typeface="Aptos"/>
+              </a:rPr>
+              <a:t>EEB 187 · Demo 8 · May 20 2026</a:t>
+            </a:r>
+          </a:p>
+        </p:txBody>
+      </p:sp>
+    </p:spTree>
+  </p:cSld>
+  <p:clrMapOvr>
+    <a:masterClrMapping/>
+  </p:clrMapOvr>
+</p:sld>
+</file>
+
+<file path=ppt/slides/slide21.xml><?xml version="1.0" encoding="utf-8"?>
 <p:sld xmlns:a="http://schemas.openxmlformats.org/drawingml/2006/main" xmlns:p="http://schemas.openxmlformats.org/presentationml/2006/main" xmlns:r="http://schemas.openxmlformats.org/officeDocument/2006/relationships">
   <p:cSld>
     <p:spTree>
